--- a/malitski/BS2_проект_5_слайдов.pptx
+++ b/malitski/BS2_проект_5_слайдов.pptx
@@ -10,6 +10,8 @@
     <p:sldId id="258" r:id="rId9"/>
     <p:sldId id="259" r:id="rId10"/>
     <p:sldId id="260" r:id="rId11"/>
+    <p:sldId id="261" r:id="rId12"/>
+    <p:sldId id="262" r:id="rId13"/>
   </p:sldIdLst>
   <p:sldSz cx="12191695" cy="6858000" type="screen4x3"/>
   <p:notesSz cx="6858000" cy="9144000"/>
@@ -342,6 +344,273 @@
         <c:crossAx val="-2068027336"/>
         <c:crosses val="autoZero"/>
         <c:majorUnit val="0.1"/>
+      </c:valAx>
+    </c:plotArea>
+    <c:dispBlanksAs val="gap"/>
+  </c:chart>
+  <c:txPr>
+    <a:bodyPr/>
+    <a:lstStyle/>
+    <a:p>
+      <a:pPr>
+        <a:defRPr sz="1800"/>
+      </a:pPr>
+      <a:endParaRPr lang="en-US"/>
+    </a:p>
+  </c:txPr>
+  <c:externalData r:id="rId1">
+    <c:autoUpdate val="0"/>
+  </c:externalData>
+</c:chartSpace>
+</file>
+
+<file path=ppt/charts/chart2.xml><?xml version="1.0" encoding="utf-8"?>
+<c:chartSpace xmlns:c="http://schemas.openxmlformats.org/drawingml/2006/chart" xmlns:a="http://schemas.openxmlformats.org/drawingml/2006/main" xmlns:r="http://schemas.openxmlformats.org/officeDocument/2006/relationships">
+  <c:date1904 val="0"/>
+  <c:chart>
+    <c:title>
+      <c:tx>
+        <c:rich>
+          <a:bodyPr/>
+          <a:lstStyle/>
+          <a:p>
+            <a:r>
+              <a:rPr sz="1100" b="1">
+                <a:solidFill>
+                  <a:srgbClr val="27272A"/>
+                </a:solidFill>
+                <a:latin typeface="Arial"/>
+              </a:rPr>
+              <a:t>Что подняло совпадение с людьми (CCC на 1997 тестовых роликах)</a:t>
+            </a:r>
+          </a:p>
+        </c:rich>
+      </c:tx>
+      <c:layout/>
+      <c:overlay val="0"/>
+    </c:title>
+    <c:autoTitleDeleted val="0"/>
+    <c:plotArea>
+      <c:barChart>
+        <c:barDir val="col"/>
+        <c:grouping val="clustered"/>
+        <c:ser>
+          <c:idx val="0"/>
+          <c:order val="0"/>
+          <c:tx>
+            <c:strRef>
+              <c:f>Sheet1!$B$1</c:f>
+              <c:strCache>
+                <c:ptCount val="1"/>
+                <c:pt idx="0">
+                  <c:v>CCC</c:v>
+                </c:pt>
+              </c:strCache>
+            </c:strRef>
+          </c:tx>
+          <c:dPt>
+            <c:idx val="0"/>
+            <c:spPr>
+              <a:solidFill>
+                <a:srgbClr val="71717A"/>
+              </a:solidFill>
+            </c:spPr>
+          </c:dPt>
+          <c:dPt>
+            <c:idx val="1"/>
+            <c:spPr>
+              <a:solidFill>
+                <a:srgbClr val="0F766E"/>
+              </a:solidFill>
+            </c:spPr>
+          </c:dPt>
+          <c:dPt>
+            <c:idx val="2"/>
+            <c:spPr>
+              <a:solidFill>
+                <a:srgbClr val="0F766E"/>
+              </a:solidFill>
+            </c:spPr>
+          </c:dPt>
+          <c:dPt>
+            <c:idx val="3"/>
+            <c:spPr>
+              <a:solidFill>
+                <a:srgbClr val="0F766E"/>
+              </a:solidFill>
+            </c:spPr>
+          </c:dPt>
+          <c:dPt>
+            <c:idx val="4"/>
+            <c:spPr>
+              <a:solidFill>
+                <a:srgbClr val="C2410C"/>
+              </a:solidFill>
+            </c:spPr>
+          </c:dPt>
+          <c:cat>
+            <c:strRef>
+              <c:f>Sheet1!$A$2:$A$6</c:f>
+              <c:strCache>
+                <c:ptCount val="5"/>
+                <c:pt idx="0">
+                  <c:v>OCEAN-AI
+одна</c:v>
+                </c:pt>
+                <c:pt idx="1">
+                  <c:v>Моя: только
+лицо</c:v>
+                </c:pt>
+                <c:pt idx="2">
+                  <c:v>Моя: все 4
+модальности</c:v>
+                </c:pt>
+                <c:pt idx="3">
+                  <c:v>Моя: среднее
+5 запусков</c:v>
+                </c:pt>
+                <c:pt idx="4">
+                  <c:v>Среднее
+с OCEAN-AI</c:v>
+                </c:pt>
+              </c:strCache>
+            </c:strRef>
+          </c:cat>
+          <c:val>
+            <c:numRef>
+              <c:f>Sheet1!$B$2:$B$6</c:f>
+              <c:numCache>
+                <c:formatCode>General</c:formatCode>
+                <c:ptCount val="5"/>
+                <c:pt idx="0">
+                  <c:v>0.703</c:v>
+                </c:pt>
+                <c:pt idx="1">
+                  <c:v>0.69</c:v>
+                </c:pt>
+                <c:pt idx="2">
+                  <c:v>0.704</c:v>
+                </c:pt>
+                <c:pt idx="3">
+                  <c:v>0.715</c:v>
+                </c:pt>
+                <c:pt idx="4">
+                  <c:v>0.733</c:v>
+                </c:pt>
+              </c:numCache>
+            </c:numRef>
+          </c:val>
+        </c:ser>
+        <c:dLbls>
+          <c:numFmt formatCode="0.000" sourceLinked="0"/>
+          <c:txPr>
+            <a:bodyPr/>
+            <a:lstStyle/>
+            <a:p>
+              <a:pPr>
+                <a:defRPr sz="1050" b="1">
+                  <a:solidFill>
+                    <a:srgbClr val="27272A"/>
+                  </a:solidFill>
+                  <a:latin typeface="Arial"/>
+                </a:defRPr>
+              </a:pPr>
+            </a:p>
+          </c:txPr>
+          <c:dLblPos val="outEnd"/>
+          <c:showLegendKey val="0"/>
+          <c:showVal val="1"/>
+          <c:showCatName val="0"/>
+          <c:showSerName val="0"/>
+          <c:showPercent val="0"/>
+          <c:showBubbleSize val="0"/>
+          <c:showLeaderLines val="1"/>
+        </c:dLbls>
+        <c:gapWidth val="70"/>
+        <c:axId val="-2068027336"/>
+        <c:axId val="-2113994440"/>
+      </c:barChart>
+      <c:catAx>
+        <c:axId val="-2068027336"/>
+        <c:scaling>
+          <c:orientation val="minMax"/>
+        </c:scaling>
+        <c:delete val="0"/>
+        <c:axPos val="b"/>
+        <c:majorTickMark val="out"/>
+        <c:minorTickMark val="none"/>
+        <c:tickLblPos val="nextTo"/>
+        <c:spPr>
+          <a:ln>
+            <a:solidFill>
+              <a:srgbClr val="D4D4D8"/>
+            </a:solidFill>
+          </a:ln>
+        </c:spPr>
+        <c:txPr>
+          <a:bodyPr/>
+          <a:lstStyle/>
+          <a:p>
+            <a:pPr>
+              <a:defRPr sz="900">
+                <a:solidFill>
+                  <a:srgbClr val="27272A"/>
+                </a:solidFill>
+                <a:latin typeface="Arial"/>
+              </a:defRPr>
+            </a:pPr>
+          </a:p>
+        </c:txPr>
+        <c:crossAx val="-2113994440"/>
+        <c:crosses val="autoZero"/>
+        <c:auto val="1"/>
+        <c:lblAlgn val="ctr"/>
+        <c:lblOffset val="100"/>
+        <c:noMultiLvlLbl val="0"/>
+      </c:catAx>
+      <c:valAx>
+        <c:axId val="-2113994440"/>
+        <c:scaling>
+          <c:max val="0.76"/>
+          <c:min val="0.6"/>
+        </c:scaling>
+        <c:delete val="0"/>
+        <c:axPos val="l"/>
+        <c:majorGridlines>
+          <c:spPr>
+            <a:ln>
+              <a:solidFill>
+                <a:srgbClr val="D4D4D8"/>
+              </a:solidFill>
+            </a:ln>
+          </c:spPr>
+        </c:majorGridlines>
+        <c:numFmt formatCode="0.00" sourceLinked="0"/>
+        <c:majorTickMark val="out"/>
+        <c:minorTickMark val="none"/>
+        <c:tickLblPos val="nextTo"/>
+        <c:spPr>
+          <a:ln>
+            <a:noFill/>
+          </a:ln>
+        </c:spPr>
+        <c:txPr>
+          <a:bodyPr/>
+          <a:lstStyle/>
+          <a:p>
+            <a:pPr>
+              <a:defRPr sz="900">
+                <a:solidFill>
+                  <a:srgbClr val="52525B"/>
+                </a:solidFill>
+                <a:latin typeface="Arial"/>
+              </a:defRPr>
+            </a:pPr>
+          </a:p>
+        </c:txPr>
+        <c:crossAx val="-2068027336"/>
+        <c:crosses val="autoZero"/>
+        <c:majorUnit val="0.04"/>
       </c:valAx>
     </c:plotArea>
     <c:dispBlanksAs val="gap"/>
@@ -13391,6 +13660,4117 @@
       <p:sp>
         <p:nvSpPr>
           <p:cNvPr id="17" name="TextBox 16"/>
+          <p:cNvSpPr txBox="1"/>
+          <p:nvPr/>
+        </p:nvSpPr>
+        <p:spPr>
+          <a:xfrm>
+            <a:off x="548640" y="6446520"/>
+            <a:ext cx="8686800" cy="274320"/>
+          </a:xfrm>
+          <a:prstGeom prst="rect">
+            <a:avLst/>
+          </a:prstGeom>
+          <a:noFill/>
+        </p:spPr>
+        <p:txBody>
+          <a:bodyPr wrap="square" anchor="t" lIns="0" rIns="0" tIns="0" bIns="0">
+            <a:spAutoFit/>
+          </a:bodyPr>
+          <a:lstStyle/>
+          <a:p>
+            <a:pPr algn="l">
+              <a:lnSpc>
+                <a:spcPct val="110000"/>
+              </a:lnSpc>
+              <a:spcAft>
+                <a:spcPts val="0"/>
+              </a:spcAft>
+            </a:pPr>
+            <a:r>
+              <a:rPr sz="900" b="0" i="0">
+                <a:solidFill>
+                  <a:srgbClr val="71717A"/>
+                </a:solidFill>
+                <a:latin typeface="Arial"/>
+              </a:rPr>
+              <a:t>BS 2.0 · анализ человека по видео · сделано в Claude Code, модель Fable 5.1, режим Ultracode · © 2026 AMLAI</a:t>
+            </a:r>
+          </a:p>
+        </p:txBody>
+      </p:sp>
+    </p:spTree>
+  </p:cSld>
+  <p:clrMapOvr>
+    <a:masterClrMapping/>
+  </p:clrMapOvr>
+</p:sld>
+</file>
+
+<file path=ppt/slides/slide6.xml><?xml version="1.0" encoding="utf-8"?>
+<p:sld xmlns:a="http://schemas.openxmlformats.org/drawingml/2006/main" xmlns:p="http://schemas.openxmlformats.org/presentationml/2006/main" xmlns:r="http://schemas.openxmlformats.org/officeDocument/2006/relationships">
+  <p:cSld>
+    <p:bg>
+      <p:bgPr>
+        <a:solidFill>
+          <a:srgbClr val="FFFFFF"/>
+        </a:solidFill>
+        <a:effectLst/>
+      </p:bgPr>
+    </p:bg>
+    <p:spTree>
+      <p:nvGrpSpPr>
+        <p:cNvPr id="1" name=""/>
+        <p:cNvGrpSpPr/>
+        <p:nvPr/>
+      </p:nvGrpSpPr>
+      <p:grpSpPr/>
+      <p:sp>
+        <p:nvSpPr>
+          <p:cNvPr id="2" name="TextBox 1"/>
+          <p:cNvSpPr txBox="1"/>
+          <p:nvPr/>
+        </p:nvSpPr>
+        <p:spPr>
+          <a:xfrm>
+            <a:off x="548640" y="320040"/>
+            <a:ext cx="11064240" cy="640080"/>
+          </a:xfrm>
+          <a:prstGeom prst="rect">
+            <a:avLst/>
+          </a:prstGeom>
+          <a:noFill/>
+        </p:spPr>
+        <p:txBody>
+          <a:bodyPr wrap="square" anchor="t" lIns="0" rIns="0" tIns="0" bIns="0">
+            <a:spAutoFit/>
+          </a:bodyPr>
+          <a:lstStyle/>
+          <a:p>
+            <a:pPr algn="l">
+              <a:lnSpc>
+                <a:spcPct val="110000"/>
+              </a:lnSpc>
+              <a:spcAft>
+                <a:spcPts val="0"/>
+              </a:spcAft>
+            </a:pPr>
+            <a:r>
+              <a:rPr sz="3200" b="1" i="0">
+                <a:solidFill>
+                  <a:srgbClr val="27272A"/>
+                </a:solidFill>
+                <a:latin typeface="Arial"/>
+              </a:rPr>
+              <a:t>Моя модель: как обучал и что подняло точность</a:t>
+            </a:r>
+          </a:p>
+        </p:txBody>
+      </p:sp>
+      <p:sp>
+        <p:nvSpPr>
+          <p:cNvPr id="3" name="TextBox 2"/>
+          <p:cNvSpPr txBox="1"/>
+          <p:nvPr/>
+        </p:nvSpPr>
+        <p:spPr>
+          <a:xfrm>
+            <a:off x="548640" y="932688"/>
+            <a:ext cx="11064240" cy="365760"/>
+          </a:xfrm>
+          <a:prstGeom prst="rect">
+            <a:avLst/>
+          </a:prstGeom>
+          <a:noFill/>
+        </p:spPr>
+        <p:txBody>
+          <a:bodyPr wrap="square" anchor="t" lIns="0" rIns="0" tIns="0" bIns="0">
+            <a:spAutoFit/>
+          </a:bodyPr>
+          <a:lstStyle/>
+          <a:p>
+            <a:pPr algn="l">
+              <a:lnSpc>
+                <a:spcPct val="110000"/>
+              </a:lnSpc>
+              <a:spcAft>
+                <a:spcPts val="0"/>
+              </a:spcAft>
+            </a:pPr>
+            <a:r>
+              <a:rPr sz="1300" b="0" i="0">
+                <a:solidFill>
+                  <a:srgbClr val="52525B"/>
+                </a:solidFill>
+                <a:latin typeface="Arial"/>
+              </a:rPr>
+              <a:t>Обучение и проверка — на First Impressions V2; точность — совпадение с оценками людей на роликах, которых модель не видела</a:t>
+            </a:r>
+          </a:p>
+        </p:txBody>
+      </p:sp>
+      <p:sp>
+        <p:nvSpPr>
+          <p:cNvPr id="4" name="TextBox 3"/>
+          <p:cNvSpPr txBox="1"/>
+          <p:nvPr/>
+        </p:nvSpPr>
+        <p:spPr>
+          <a:xfrm>
+            <a:off x="548640" y="1463040"/>
+            <a:ext cx="11064240" cy="292608"/>
+          </a:xfrm>
+          <a:prstGeom prst="rect">
+            <a:avLst/>
+          </a:prstGeom>
+          <a:noFill/>
+        </p:spPr>
+        <p:txBody>
+          <a:bodyPr wrap="square" anchor="t" lIns="0" rIns="0" tIns="0" bIns="0">
+            <a:spAutoFit/>
+          </a:bodyPr>
+          <a:lstStyle/>
+          <a:p>
+            <a:pPr algn="l">
+              <a:lnSpc>
+                <a:spcPct val="110000"/>
+              </a:lnSpc>
+              <a:spcAft>
+                <a:spcPts val="0"/>
+              </a:spcAft>
+            </a:pPr>
+            <a:r>
+              <a:rPr sz="1200" b="1" i="0">
+                <a:solidFill>
+                  <a:srgbClr val="27272A"/>
+                </a:solidFill>
+                <a:latin typeface="Arial"/>
+              </a:rPr>
+              <a:t>Данные: 10 000 роликов по 15 с, заранее разделены составителями набора на три части</a:t>
+            </a:r>
+          </a:p>
+        </p:txBody>
+      </p:sp>
+      <p:sp>
+        <p:nvSpPr>
+          <p:cNvPr id="5" name="Rounded Rectangle 4"/>
+          <p:cNvSpPr/>
+          <p:nvPr/>
+        </p:nvSpPr>
+        <p:spPr>
+          <a:xfrm>
+            <a:off x="548640" y="1810512"/>
+            <a:ext cx="6600139" cy="420624"/>
+          </a:xfrm>
+          <a:prstGeom prst="roundRect">
+            <a:avLst>
+              <a:gd name="adj" fmla="val 13043"/>
+            </a:avLst>
+          </a:prstGeom>
+          <a:solidFill>
+            <a:srgbClr val="C2410C"/>
+          </a:solidFill>
+          <a:ln>
+            <a:noFill/>
+          </a:ln>
+          <a:effectLst/>
+        </p:spPr>
+        <p:style>
+          <a:lnRef idx="1">
+            <a:schemeClr val="accent1"/>
+          </a:lnRef>
+          <a:fillRef idx="3">
+            <a:schemeClr val="accent1"/>
+          </a:fillRef>
+          <a:effectRef idx="2">
+            <a:schemeClr val="accent1"/>
+          </a:effectRef>
+          <a:fontRef idx="minor">
+            <a:schemeClr val="lt1"/>
+          </a:fontRef>
+        </p:style>
+        <p:txBody>
+          <a:bodyPr rtlCol="0" anchor="ctr"/>
+          <a:lstStyle/>
+          <a:p/>
+        </p:txBody>
+      </p:sp>
+      <p:sp>
+        <p:nvSpPr>
+          <p:cNvPr id="6" name="TextBox 5"/>
+          <p:cNvSpPr txBox="1"/>
+          <p:nvPr/>
+        </p:nvSpPr>
+        <p:spPr>
+          <a:xfrm>
+            <a:off x="548640" y="1810512"/>
+            <a:ext cx="6600139" cy="420624"/>
+          </a:xfrm>
+          <a:prstGeom prst="rect">
+            <a:avLst/>
+          </a:prstGeom>
+          <a:noFill/>
+        </p:spPr>
+        <p:txBody>
+          <a:bodyPr wrap="square" anchor="ctr" lIns="0" rIns="0" tIns="0" bIns="0">
+            <a:spAutoFit/>
+          </a:bodyPr>
+          <a:lstStyle/>
+          <a:p>
+            <a:pPr algn="ctr">
+              <a:lnSpc>
+                <a:spcPct val="110000"/>
+              </a:lnSpc>
+              <a:spcAft>
+                <a:spcPts val="0"/>
+              </a:spcAft>
+            </a:pPr>
+            <a:r>
+              <a:rPr sz="1100" b="1" i="0">
+                <a:solidFill>
+                  <a:srgbClr val="FFFFFF"/>
+                </a:solidFill>
+                <a:latin typeface="Arial"/>
+              </a:rPr>
+              <a:t>Обучение — 6000 роликов (шаг 2)</a:t>
+            </a:r>
+          </a:p>
+        </p:txBody>
+      </p:sp>
+      <p:sp>
+        <p:nvSpPr>
+          <p:cNvPr id="7" name="Rounded Rectangle 6"/>
+          <p:cNvSpPr/>
+          <p:nvPr/>
+        </p:nvSpPr>
+        <p:spPr>
+          <a:xfrm>
+            <a:off x="7194499" y="1810512"/>
+            <a:ext cx="2200046" cy="420624"/>
+          </a:xfrm>
+          <a:prstGeom prst="roundRect">
+            <a:avLst>
+              <a:gd name="adj" fmla="val 13043"/>
+            </a:avLst>
+          </a:prstGeom>
+          <a:solidFill>
+            <a:srgbClr val="71717A"/>
+          </a:solidFill>
+          <a:ln>
+            <a:noFill/>
+          </a:ln>
+          <a:effectLst/>
+        </p:spPr>
+        <p:style>
+          <a:lnRef idx="1">
+            <a:schemeClr val="accent1"/>
+          </a:lnRef>
+          <a:fillRef idx="3">
+            <a:schemeClr val="accent1"/>
+          </a:fillRef>
+          <a:effectRef idx="2">
+            <a:schemeClr val="accent1"/>
+          </a:effectRef>
+          <a:fontRef idx="minor">
+            <a:schemeClr val="lt1"/>
+          </a:fontRef>
+        </p:style>
+        <p:txBody>
+          <a:bodyPr rtlCol="0" anchor="ctr"/>
+          <a:lstStyle/>
+          <a:p/>
+        </p:txBody>
+      </p:sp>
+      <p:sp>
+        <p:nvSpPr>
+          <p:cNvPr id="8" name="TextBox 7"/>
+          <p:cNvSpPr txBox="1"/>
+          <p:nvPr/>
+        </p:nvSpPr>
+        <p:spPr>
+          <a:xfrm>
+            <a:off x="7194499" y="1810512"/>
+            <a:ext cx="2200046" cy="420624"/>
+          </a:xfrm>
+          <a:prstGeom prst="rect">
+            <a:avLst/>
+          </a:prstGeom>
+          <a:noFill/>
+        </p:spPr>
+        <p:txBody>
+          <a:bodyPr wrap="square" anchor="ctr" lIns="0" rIns="0" tIns="0" bIns="0">
+            <a:spAutoFit/>
+          </a:bodyPr>
+          <a:lstStyle/>
+          <a:p>
+            <a:pPr algn="ctr">
+              <a:lnSpc>
+                <a:spcPct val="110000"/>
+              </a:lnSpc>
+              <a:spcAft>
+                <a:spcPts val="0"/>
+              </a:spcAft>
+            </a:pPr>
+            <a:r>
+              <a:rPr sz="1100" b="1" i="0">
+                <a:solidFill>
+                  <a:srgbClr val="FFFFFF"/>
+                </a:solidFill>
+                <a:latin typeface="Arial"/>
+              </a:rPr>
+              <a:t>Проверка — 2000 (шаг 3)</a:t>
+            </a:r>
+          </a:p>
+        </p:txBody>
+      </p:sp>
+      <p:sp>
+        <p:nvSpPr>
+          <p:cNvPr id="9" name="Rounded Rectangle 8"/>
+          <p:cNvSpPr/>
+          <p:nvPr/>
+        </p:nvSpPr>
+        <p:spPr>
+          <a:xfrm>
+            <a:off x="9440265" y="1810512"/>
+            <a:ext cx="2200046" cy="420624"/>
+          </a:xfrm>
+          <a:prstGeom prst="roundRect">
+            <a:avLst>
+              <a:gd name="adj" fmla="val 13043"/>
+            </a:avLst>
+          </a:prstGeom>
+          <a:solidFill>
+            <a:srgbClr val="27272A"/>
+          </a:solidFill>
+          <a:ln>
+            <a:noFill/>
+          </a:ln>
+          <a:effectLst/>
+        </p:spPr>
+        <p:style>
+          <a:lnRef idx="1">
+            <a:schemeClr val="accent1"/>
+          </a:lnRef>
+          <a:fillRef idx="3">
+            <a:schemeClr val="accent1"/>
+          </a:fillRef>
+          <a:effectRef idx="2">
+            <a:schemeClr val="accent1"/>
+          </a:effectRef>
+          <a:fontRef idx="minor">
+            <a:schemeClr val="lt1"/>
+          </a:fontRef>
+        </p:style>
+        <p:txBody>
+          <a:bodyPr rtlCol="0" anchor="ctr"/>
+          <a:lstStyle/>
+          <a:p/>
+        </p:txBody>
+      </p:sp>
+      <p:sp>
+        <p:nvSpPr>
+          <p:cNvPr id="10" name="TextBox 9"/>
+          <p:cNvSpPr txBox="1"/>
+          <p:nvPr/>
+        </p:nvSpPr>
+        <p:spPr>
+          <a:xfrm>
+            <a:off x="9440265" y="1810512"/>
+            <a:ext cx="2200046" cy="420624"/>
+          </a:xfrm>
+          <a:prstGeom prst="rect">
+            <a:avLst/>
+          </a:prstGeom>
+          <a:noFill/>
+        </p:spPr>
+        <p:txBody>
+          <a:bodyPr wrap="square" anchor="ctr" lIns="0" rIns="0" tIns="0" bIns="0">
+            <a:spAutoFit/>
+          </a:bodyPr>
+          <a:lstStyle/>
+          <a:p>
+            <a:pPr algn="ctr">
+              <a:lnSpc>
+                <a:spcPct val="110000"/>
+              </a:lnSpc>
+              <a:spcAft>
+                <a:spcPts val="0"/>
+              </a:spcAft>
+            </a:pPr>
+            <a:r>
+              <a:rPr sz="1100" b="1" i="0">
+                <a:solidFill>
+                  <a:srgbClr val="FFFFFF"/>
+                </a:solidFill>
+                <a:latin typeface="Arial"/>
+              </a:rPr>
+              <a:t>Тест — 2000 (шаг 5)</a:t>
+            </a:r>
+          </a:p>
+        </p:txBody>
+      </p:sp>
+      <p:sp>
+        <p:nvSpPr>
+          <p:cNvPr id="11" name="TextBox 10"/>
+          <p:cNvSpPr txBox="1"/>
+          <p:nvPr/>
+        </p:nvSpPr>
+        <p:spPr>
+          <a:xfrm>
+            <a:off x="548640" y="2304288"/>
+            <a:ext cx="11064240" cy="411480"/>
+          </a:xfrm>
+          <a:prstGeom prst="rect">
+            <a:avLst/>
+          </a:prstGeom>
+          <a:noFill/>
+        </p:spPr>
+        <p:txBody>
+          <a:bodyPr wrap="square" anchor="t" lIns="0" rIns="0" tIns="0" bIns="0">
+            <a:spAutoFit/>
+          </a:bodyPr>
+          <a:lstStyle/>
+          <a:p>
+            <a:pPr algn="l">
+              <a:lnSpc>
+                <a:spcPct val="105000"/>
+              </a:lnSpc>
+              <a:spcAft>
+                <a:spcPts val="0"/>
+              </a:spcAft>
+            </a:pPr>
+            <a:r>
+              <a:rPr sz="1000" b="0" i="0">
+                <a:solidFill>
+                  <a:srgbClr val="52525B"/>
+                </a:solidFill>
+                <a:latin typeface="Arial"/>
+              </a:rPr>
+              <a:t>Англоязычные блогеры говорят в камеру. Оценки людей: наблюдатели на Amazon Mechanical Turk сравнивали пары роликов («кто из двоих кажется общительнее»), из сравнений получена оценка от 0 до 1 по пяти чертам и «собеседованию».</a:t>
+            </a:r>
+          </a:p>
+        </p:txBody>
+      </p:sp>
+      <p:sp>
+        <p:nvSpPr>
+          <p:cNvPr id="12" name="TextBox 11"/>
+          <p:cNvSpPr txBox="1"/>
+          <p:nvPr/>
+        </p:nvSpPr>
+        <p:spPr>
+          <a:xfrm>
+            <a:off x="548640" y="2834640"/>
+            <a:ext cx="5303520" cy="274320"/>
+          </a:xfrm>
+          <a:prstGeom prst="rect">
+            <a:avLst/>
+          </a:prstGeom>
+          <a:noFill/>
+        </p:spPr>
+        <p:txBody>
+          <a:bodyPr wrap="square" anchor="t" lIns="0" rIns="0" tIns="0" bIns="0">
+            <a:spAutoFit/>
+          </a:bodyPr>
+          <a:lstStyle/>
+          <a:p>
+            <a:pPr algn="l">
+              <a:lnSpc>
+                <a:spcPct val="110000"/>
+              </a:lnSpc>
+              <a:spcAft>
+                <a:spcPts val="0"/>
+              </a:spcAft>
+            </a:pPr>
+            <a:r>
+              <a:rPr sz="1200" b="1" i="0">
+                <a:solidFill>
+                  <a:srgbClr val="27272A"/>
+                </a:solidFill>
+                <a:latin typeface="Arial"/>
+              </a:rPr>
+              <a:t>Как шло обучение</a:t>
+            </a:r>
+          </a:p>
+        </p:txBody>
+      </p:sp>
+      <p:sp>
+        <p:nvSpPr>
+          <p:cNvPr id="13" name="Oval 12"/>
+          <p:cNvSpPr/>
+          <p:nvPr/>
+        </p:nvSpPr>
+        <p:spPr>
+          <a:xfrm>
+            <a:off x="548640" y="3200400"/>
+            <a:ext cx="292608" cy="292608"/>
+          </a:xfrm>
+          <a:prstGeom prst="ellipse">
+            <a:avLst/>
+          </a:prstGeom>
+          <a:solidFill>
+            <a:srgbClr val="C2410C"/>
+          </a:solidFill>
+          <a:ln>
+            <a:noFill/>
+          </a:ln>
+          <a:effectLst/>
+        </p:spPr>
+        <p:style>
+          <a:lnRef idx="1">
+            <a:schemeClr val="accent1"/>
+          </a:lnRef>
+          <a:fillRef idx="3">
+            <a:schemeClr val="accent1"/>
+          </a:fillRef>
+          <a:effectRef idx="2">
+            <a:schemeClr val="accent1"/>
+          </a:effectRef>
+          <a:fontRef idx="minor">
+            <a:schemeClr val="lt1"/>
+          </a:fontRef>
+        </p:style>
+        <p:txBody>
+          <a:bodyPr rtlCol="0" anchor="ctr" lIns="0" rIns="0" tIns="0" bIns="0"/>
+          <a:lstStyle/>
+          <a:p>
+            <a:pPr algn="ctr"/>
+            <a:r>
+              <a:rPr sz="1100" b="1">
+                <a:solidFill>
+                  <a:srgbClr val="FFFFFF"/>
+                </a:solidFill>
+                <a:latin typeface="Arial"/>
+              </a:rPr>
+              <a:t>1</a:t>
+            </a:r>
+          </a:p>
+        </p:txBody>
+      </p:sp>
+      <p:sp>
+        <p:nvSpPr>
+          <p:cNvPr id="14" name="TextBox 13"/>
+          <p:cNvSpPr txBox="1"/>
+          <p:nvPr/>
+        </p:nvSpPr>
+        <p:spPr>
+          <a:xfrm>
+            <a:off x="960120" y="3182112"/>
+            <a:ext cx="4754880" cy="475488"/>
+          </a:xfrm>
+          <a:prstGeom prst="rect">
+            <a:avLst/>
+          </a:prstGeom>
+          <a:noFill/>
+        </p:spPr>
+        <p:txBody>
+          <a:bodyPr wrap="square" anchor="t" lIns="0" rIns="0" tIns="0" bIns="0">
+            <a:spAutoFit/>
+          </a:bodyPr>
+          <a:lstStyle/>
+          <a:p>
+            <a:pPr algn="l">
+              <a:lnSpc>
+                <a:spcPct val="105000"/>
+              </a:lnSpc>
+              <a:spcAft>
+                <a:spcPts val="0"/>
+              </a:spcAft>
+            </a:pPr>
+            <a:r>
+              <a:rPr sz="1000" b="1" i="0">
+                <a:solidFill>
+                  <a:srgbClr val="27272A"/>
+                </a:solidFill>
+                <a:latin typeface="Arial"/>
+              </a:rPr>
+              <a:t>Признаки — один раз. </a:t>
+            </a:r>
+            <a:r>
+              <a:rPr sz="1000" b="0" i="0">
+                <a:solidFill>
+                  <a:srgbClr val="52525B"/>
+                </a:solidFill>
+                <a:latin typeface="Arial"/>
+              </a:rPr>
+              <a:t>Готовые модели превратили все 10 000 роликов в наборы чисел за 48 минут; сами они не менялись.</a:t>
+            </a:r>
+          </a:p>
+        </p:txBody>
+      </p:sp>
+      <p:sp>
+        <p:nvSpPr>
+          <p:cNvPr id="15" name="Oval 14"/>
+          <p:cNvSpPr/>
+          <p:nvPr/>
+        </p:nvSpPr>
+        <p:spPr>
+          <a:xfrm>
+            <a:off x="548640" y="3657600"/>
+            <a:ext cx="292608" cy="292608"/>
+          </a:xfrm>
+          <a:prstGeom prst="ellipse">
+            <a:avLst/>
+          </a:prstGeom>
+          <a:solidFill>
+            <a:srgbClr val="C2410C"/>
+          </a:solidFill>
+          <a:ln>
+            <a:noFill/>
+          </a:ln>
+          <a:effectLst/>
+        </p:spPr>
+        <p:style>
+          <a:lnRef idx="1">
+            <a:schemeClr val="accent1"/>
+          </a:lnRef>
+          <a:fillRef idx="3">
+            <a:schemeClr val="accent1"/>
+          </a:fillRef>
+          <a:effectRef idx="2">
+            <a:schemeClr val="accent1"/>
+          </a:effectRef>
+          <a:fontRef idx="minor">
+            <a:schemeClr val="lt1"/>
+          </a:fontRef>
+        </p:style>
+        <p:txBody>
+          <a:bodyPr rtlCol="0" anchor="ctr" lIns="0" rIns="0" tIns="0" bIns="0"/>
+          <a:lstStyle/>
+          <a:p>
+            <a:pPr algn="ctr"/>
+            <a:r>
+              <a:rPr sz="1100" b="1">
+                <a:solidFill>
+                  <a:srgbClr val="FFFFFF"/>
+                </a:solidFill>
+                <a:latin typeface="Arial"/>
+              </a:rPr>
+              <a:t>2</a:t>
+            </a:r>
+          </a:p>
+        </p:txBody>
+      </p:sp>
+      <p:sp>
+        <p:nvSpPr>
+          <p:cNvPr id="16" name="TextBox 15"/>
+          <p:cNvSpPr txBox="1"/>
+          <p:nvPr/>
+        </p:nvSpPr>
+        <p:spPr>
+          <a:xfrm>
+            <a:off x="960120" y="3639312"/>
+            <a:ext cx="4754880" cy="475488"/>
+          </a:xfrm>
+          <a:prstGeom prst="rect">
+            <a:avLst/>
+          </a:prstGeom>
+          <a:noFill/>
+        </p:spPr>
+        <p:txBody>
+          <a:bodyPr wrap="square" anchor="t" lIns="0" rIns="0" tIns="0" bIns="0">
+            <a:spAutoFit/>
+          </a:bodyPr>
+          <a:lstStyle/>
+          <a:p>
+            <a:pPr algn="l">
+              <a:lnSpc>
+                <a:spcPct val="105000"/>
+              </a:lnSpc>
+              <a:spcAft>
+                <a:spcPts val="0"/>
+              </a:spcAft>
+            </a:pPr>
+            <a:r>
+              <a:rPr sz="1000" b="1" i="0">
+                <a:solidFill>
+                  <a:srgbClr val="27272A"/>
+                </a:solidFill>
+                <a:latin typeface="Arial"/>
+              </a:rPr>
+              <a:t>Обучение слияния </a:t>
+            </a:r>
+            <a:r>
+              <a:rPr sz="1000" b="0" i="0">
+                <a:solidFill>
+                  <a:srgbClr val="52525B"/>
+                </a:solidFill>
+                <a:latin typeface="Arial"/>
+              </a:rPr>
+              <a:t>на 5992 роликах: сеть выдаёт шесть оценок, сравнивает их с оценками людей и уменьшает ошибку.</a:t>
+            </a:r>
+          </a:p>
+        </p:txBody>
+      </p:sp>
+      <p:sp>
+        <p:nvSpPr>
+          <p:cNvPr id="17" name="Oval 16"/>
+          <p:cNvSpPr/>
+          <p:nvPr/>
+        </p:nvSpPr>
+        <p:spPr>
+          <a:xfrm>
+            <a:off x="548640" y="4114800"/>
+            <a:ext cx="292608" cy="292608"/>
+          </a:xfrm>
+          <a:prstGeom prst="ellipse">
+            <a:avLst/>
+          </a:prstGeom>
+          <a:solidFill>
+            <a:srgbClr val="C2410C"/>
+          </a:solidFill>
+          <a:ln>
+            <a:noFill/>
+          </a:ln>
+          <a:effectLst/>
+        </p:spPr>
+        <p:style>
+          <a:lnRef idx="1">
+            <a:schemeClr val="accent1"/>
+          </a:lnRef>
+          <a:fillRef idx="3">
+            <a:schemeClr val="accent1"/>
+          </a:fillRef>
+          <a:effectRef idx="2">
+            <a:schemeClr val="accent1"/>
+          </a:effectRef>
+          <a:fontRef idx="minor">
+            <a:schemeClr val="lt1"/>
+          </a:fontRef>
+        </p:style>
+        <p:txBody>
+          <a:bodyPr rtlCol="0" anchor="ctr" lIns="0" rIns="0" tIns="0" bIns="0"/>
+          <a:lstStyle/>
+          <a:p>
+            <a:pPr algn="ctr"/>
+            <a:r>
+              <a:rPr sz="1100" b="1">
+                <a:solidFill>
+                  <a:srgbClr val="FFFFFF"/>
+                </a:solidFill>
+                <a:latin typeface="Arial"/>
+              </a:rPr>
+              <a:t>3</a:t>
+            </a:r>
+          </a:p>
+        </p:txBody>
+      </p:sp>
+      <p:sp>
+        <p:nvSpPr>
+          <p:cNvPr id="18" name="TextBox 17"/>
+          <p:cNvSpPr txBox="1"/>
+          <p:nvPr/>
+        </p:nvSpPr>
+        <p:spPr>
+          <a:xfrm>
+            <a:off x="960120" y="4096512"/>
+            <a:ext cx="4754880" cy="475488"/>
+          </a:xfrm>
+          <a:prstGeom prst="rect">
+            <a:avLst/>
+          </a:prstGeom>
+          <a:noFill/>
+        </p:spPr>
+        <p:txBody>
+          <a:bodyPr wrap="square" anchor="t" lIns="0" rIns="0" tIns="0" bIns="0">
+            <a:spAutoFit/>
+          </a:bodyPr>
+          <a:lstStyle/>
+          <a:p>
+            <a:pPr algn="l">
+              <a:lnSpc>
+                <a:spcPct val="105000"/>
+              </a:lnSpc>
+              <a:spcAft>
+                <a:spcPts val="0"/>
+              </a:spcAft>
+            </a:pPr>
+            <a:r>
+              <a:rPr sz="1000" b="1" i="0">
+                <a:solidFill>
+                  <a:srgbClr val="27272A"/>
+                </a:solidFill>
+                <a:latin typeface="Arial"/>
+              </a:rPr>
+              <a:t>Выбор лучшей эпохи </a:t>
+            </a:r>
+            <a:r>
+              <a:rPr sz="1000" b="0" i="0">
+                <a:solidFill>
+                  <a:srgbClr val="52525B"/>
+                </a:solidFill>
+                <a:latin typeface="Arial"/>
+              </a:rPr>
+              <a:t>по проверочной части; если 15 эпох подряд лучше не становится — стоп.</a:t>
+            </a:r>
+          </a:p>
+        </p:txBody>
+      </p:sp>
+      <p:sp>
+        <p:nvSpPr>
+          <p:cNvPr id="19" name="Oval 18"/>
+          <p:cNvSpPr/>
+          <p:nvPr/>
+        </p:nvSpPr>
+        <p:spPr>
+          <a:xfrm>
+            <a:off x="548640" y="4572000"/>
+            <a:ext cx="292608" cy="292608"/>
+          </a:xfrm>
+          <a:prstGeom prst="ellipse">
+            <a:avLst/>
+          </a:prstGeom>
+          <a:solidFill>
+            <a:srgbClr val="C2410C"/>
+          </a:solidFill>
+          <a:ln>
+            <a:noFill/>
+          </a:ln>
+          <a:effectLst/>
+        </p:spPr>
+        <p:style>
+          <a:lnRef idx="1">
+            <a:schemeClr val="accent1"/>
+          </a:lnRef>
+          <a:fillRef idx="3">
+            <a:schemeClr val="accent1"/>
+          </a:fillRef>
+          <a:effectRef idx="2">
+            <a:schemeClr val="accent1"/>
+          </a:effectRef>
+          <a:fontRef idx="minor">
+            <a:schemeClr val="lt1"/>
+          </a:fontRef>
+        </p:style>
+        <p:txBody>
+          <a:bodyPr rtlCol="0" anchor="ctr" lIns="0" rIns="0" tIns="0" bIns="0"/>
+          <a:lstStyle/>
+          <a:p>
+            <a:pPr algn="ctr"/>
+            <a:r>
+              <a:rPr sz="1100" b="1">
+                <a:solidFill>
+                  <a:srgbClr val="FFFFFF"/>
+                </a:solidFill>
+                <a:latin typeface="Arial"/>
+              </a:rPr>
+              <a:t>4</a:t>
+            </a:r>
+          </a:p>
+        </p:txBody>
+      </p:sp>
+      <p:sp>
+        <p:nvSpPr>
+          <p:cNvPr id="20" name="TextBox 19"/>
+          <p:cNvSpPr txBox="1"/>
+          <p:nvPr/>
+        </p:nvSpPr>
+        <p:spPr>
+          <a:xfrm>
+            <a:off x="960120" y="4553712"/>
+            <a:ext cx="4754880" cy="475488"/>
+          </a:xfrm>
+          <a:prstGeom prst="rect">
+            <a:avLst/>
+          </a:prstGeom>
+          <a:noFill/>
+        </p:spPr>
+        <p:txBody>
+          <a:bodyPr wrap="square" anchor="t" lIns="0" rIns="0" tIns="0" bIns="0">
+            <a:spAutoFit/>
+          </a:bodyPr>
+          <a:lstStyle/>
+          <a:p>
+            <a:pPr algn="l">
+              <a:lnSpc>
+                <a:spcPct val="105000"/>
+              </a:lnSpc>
+              <a:spcAft>
+                <a:spcPts val="0"/>
+              </a:spcAft>
+            </a:pPr>
+            <a:r>
+              <a:rPr sz="1000" b="1" i="0">
+                <a:solidFill>
+                  <a:srgbClr val="27272A"/>
+                </a:solidFill>
+                <a:latin typeface="Arial"/>
+              </a:rPr>
+              <a:t>Пять запусков </a:t>
+            </a:r>
+            <a:r>
+              <a:rPr sz="1000" b="0" i="0">
+                <a:solidFill>
+                  <a:srgbClr val="52525B"/>
+                </a:solidFill>
+                <a:latin typeface="Arial"/>
+              </a:rPr>
+              <a:t>с разными случайными начальными весами, их оценки усредняются.</a:t>
+            </a:r>
+          </a:p>
+        </p:txBody>
+      </p:sp>
+      <p:sp>
+        <p:nvSpPr>
+          <p:cNvPr id="21" name="Oval 20"/>
+          <p:cNvSpPr/>
+          <p:nvPr/>
+        </p:nvSpPr>
+        <p:spPr>
+          <a:xfrm>
+            <a:off x="548640" y="5029200"/>
+            <a:ext cx="292608" cy="292608"/>
+          </a:xfrm>
+          <a:prstGeom prst="ellipse">
+            <a:avLst/>
+          </a:prstGeom>
+          <a:solidFill>
+            <a:srgbClr val="C2410C"/>
+          </a:solidFill>
+          <a:ln>
+            <a:noFill/>
+          </a:ln>
+          <a:effectLst/>
+        </p:spPr>
+        <p:style>
+          <a:lnRef idx="1">
+            <a:schemeClr val="accent1"/>
+          </a:lnRef>
+          <a:fillRef idx="3">
+            <a:schemeClr val="accent1"/>
+          </a:fillRef>
+          <a:effectRef idx="2">
+            <a:schemeClr val="accent1"/>
+          </a:effectRef>
+          <a:fontRef idx="minor">
+            <a:schemeClr val="lt1"/>
+          </a:fontRef>
+        </p:style>
+        <p:txBody>
+          <a:bodyPr rtlCol="0" anchor="ctr" lIns="0" rIns="0" tIns="0" bIns="0"/>
+          <a:lstStyle/>
+          <a:p>
+            <a:pPr algn="ctr"/>
+            <a:r>
+              <a:rPr sz="1100" b="1">
+                <a:solidFill>
+                  <a:srgbClr val="FFFFFF"/>
+                </a:solidFill>
+                <a:latin typeface="Arial"/>
+              </a:rPr>
+              <a:t>5</a:t>
+            </a:r>
+          </a:p>
+        </p:txBody>
+      </p:sp>
+      <p:sp>
+        <p:nvSpPr>
+          <p:cNvPr id="22" name="TextBox 21"/>
+          <p:cNvSpPr txBox="1"/>
+          <p:nvPr/>
+        </p:nvSpPr>
+        <p:spPr>
+          <a:xfrm>
+            <a:off x="960120" y="5010912"/>
+            <a:ext cx="4754880" cy="475488"/>
+          </a:xfrm>
+          <a:prstGeom prst="rect">
+            <a:avLst/>
+          </a:prstGeom>
+          <a:noFill/>
+        </p:spPr>
+        <p:txBody>
+          <a:bodyPr wrap="square" anchor="t" lIns="0" rIns="0" tIns="0" bIns="0">
+            <a:spAutoFit/>
+          </a:bodyPr>
+          <a:lstStyle/>
+          <a:p>
+            <a:pPr algn="l">
+              <a:lnSpc>
+                <a:spcPct val="105000"/>
+              </a:lnSpc>
+              <a:spcAft>
+                <a:spcPts val="0"/>
+              </a:spcAft>
+            </a:pPr>
+            <a:r>
+              <a:rPr sz="1000" b="1" i="0">
+                <a:solidFill>
+                  <a:srgbClr val="27272A"/>
+                </a:solidFill>
+                <a:latin typeface="Arial"/>
+              </a:rPr>
+              <a:t>Тест — один раз, в конце: </a:t>
+            </a:r>
+            <a:r>
+              <a:rPr sz="1000" b="0" i="0">
+                <a:solidFill>
+                  <a:srgbClr val="52525B"/>
+                </a:solidFill>
+                <a:latin typeface="Arial"/>
+              </a:rPr>
+              <a:t>1997 роликов, которых модель не видела; OCEAN-AI проверена на тех же роликах. На тесте ничего не подбиралось.</a:t>
+            </a:r>
+          </a:p>
+        </p:txBody>
+      </p:sp>
+      <p:graphicFrame>
+        <p:nvGraphicFramePr>
+          <p:cNvPr id="23" name="Chart 22"/>
+          <p:cNvGraphicFramePr>
+            <a:graphicFrameLocks noGrp="1"/>
+          </p:cNvGraphicFramePr>
+          <p:nvPr/>
+        </p:nvGraphicFramePr>
+        <p:xfrm>
+          <a:off x="5989320" y="2788920"/>
+          <a:ext cx="5669280" cy="2194560"/>
+        </p:xfrm>
+        <a:graphic>
+          <a:graphicData uri="http://schemas.openxmlformats.org/drawingml/2006/chart">
+            <c:chart xmlns:c="http://schemas.openxmlformats.org/drawingml/2006/chart" r:id="rId2"/>
+          </a:graphicData>
+        </a:graphic>
+      </p:graphicFrame>
+      <p:sp>
+        <p:nvSpPr>
+          <p:cNvPr id="24" name="TextBox 23"/>
+          <p:cNvSpPr txBox="1"/>
+          <p:nvPr/>
+        </p:nvSpPr>
+        <p:spPr>
+          <a:xfrm>
+            <a:off x="6080760" y="5001768"/>
+            <a:ext cx="5532120" cy="457200"/>
+          </a:xfrm>
+          <a:prstGeom prst="rect">
+            <a:avLst/>
+          </a:prstGeom>
+          <a:noFill/>
+        </p:spPr>
+        <p:txBody>
+          <a:bodyPr wrap="square" anchor="t" lIns="0" rIns="0" tIns="0" bIns="0">
+            <a:spAutoFit/>
+          </a:bodyPr>
+          <a:lstStyle/>
+          <a:p>
+            <a:pPr algn="l">
+              <a:lnSpc>
+                <a:spcPct val="103000"/>
+              </a:lnSpc>
+              <a:spcAft>
+                <a:spcPts val="0"/>
+              </a:spcAft>
+            </a:pPr>
+            <a:r>
+              <a:rPr sz="900" b="1" i="0">
+                <a:solidFill>
+                  <a:srgbClr val="52525B"/>
+                </a:solidFill>
+                <a:latin typeface="Arial"/>
+              </a:rPr>
+              <a:t>Голос, текст и описание </a:t>
+            </a:r>
+            <a:r>
+              <a:rPr sz="900" b="0" i="0">
+                <a:solidFill>
+                  <a:srgbClr val="52525B"/>
+                </a:solidFill>
+                <a:latin typeface="Arial"/>
+              </a:rPr>
+              <a:t>вместе добавили к лицу около 0.014, каждый по отдельности — в пределах случайного разброса. </a:t>
+            </a:r>
+            <a:r>
+              <a:rPr sz="900" b="1" i="0">
+                <a:solidFill>
+                  <a:srgbClr val="52525B"/>
+                </a:solidFill>
+                <a:latin typeface="Arial"/>
+              </a:rPr>
+              <a:t>Пять запусков </a:t>
+            </a:r>
+            <a:r>
+              <a:rPr sz="900" b="0" i="0">
+                <a:solidFill>
+                  <a:srgbClr val="52525B"/>
+                </a:solidFill>
+                <a:latin typeface="Arial"/>
+              </a:rPr>
+              <a:t>— ещё около 0.01. </a:t>
+            </a:r>
+            <a:r>
+              <a:rPr sz="900" b="1" i="0">
+                <a:solidFill>
+                  <a:srgbClr val="C2410C"/>
+                </a:solidFill>
+                <a:latin typeface="Arial"/>
+              </a:rPr>
+              <a:t>Сложение с OCEAN-AI </a:t>
+            </a:r>
+            <a:r>
+              <a:rPr sz="900" b="0" i="0">
+                <a:solidFill>
+                  <a:srgbClr val="52525B"/>
+                </a:solidFill>
+                <a:latin typeface="Arial"/>
+              </a:rPr>
+              <a:t>— +0.018, самый большой шаг. Ось начинается с 0.6.</a:t>
+            </a:r>
+          </a:p>
+        </p:txBody>
+      </p:sp>
+      <p:sp>
+        <p:nvSpPr>
+          <p:cNvPr id="25" name="Rounded Rectangle 24"/>
+          <p:cNvSpPr/>
+          <p:nvPr/>
+        </p:nvSpPr>
+        <p:spPr>
+          <a:xfrm>
+            <a:off x="548640" y="5559552"/>
+            <a:ext cx="5440680" cy="804672"/>
+          </a:xfrm>
+          <a:prstGeom prst="roundRect">
+            <a:avLst>
+              <a:gd name="adj" fmla="val 9090"/>
+            </a:avLst>
+          </a:prstGeom>
+          <a:solidFill>
+            <a:srgbClr val="F4F4F5"/>
+          </a:solidFill>
+          <a:ln>
+            <a:noFill/>
+          </a:ln>
+          <a:effectLst/>
+        </p:spPr>
+        <p:style>
+          <a:lnRef idx="1">
+            <a:schemeClr val="accent1"/>
+          </a:lnRef>
+          <a:fillRef idx="3">
+            <a:schemeClr val="accent1"/>
+          </a:fillRef>
+          <a:effectRef idx="2">
+            <a:schemeClr val="accent1"/>
+          </a:effectRef>
+          <a:fontRef idx="minor">
+            <a:schemeClr val="lt1"/>
+          </a:fontRef>
+        </p:style>
+        <p:txBody>
+          <a:bodyPr rtlCol="0" anchor="ctr"/>
+          <a:lstStyle/>
+          <a:p/>
+        </p:txBody>
+      </p:sp>
+      <p:sp>
+        <p:nvSpPr>
+          <p:cNvPr id="26" name="TextBox 25"/>
+          <p:cNvSpPr txBox="1"/>
+          <p:nvPr/>
+        </p:nvSpPr>
+        <p:spPr>
+          <a:xfrm>
+            <a:off x="713232" y="5596128"/>
+            <a:ext cx="5120640" cy="731520"/>
+          </a:xfrm>
+          <a:prstGeom prst="rect">
+            <a:avLst/>
+          </a:prstGeom>
+          <a:noFill/>
+        </p:spPr>
+        <p:txBody>
+          <a:bodyPr wrap="square" anchor="ctr" lIns="0" rIns="0" tIns="0" bIns="0">
+            <a:spAutoFit/>
+          </a:bodyPr>
+          <a:lstStyle/>
+          <a:p>
+            <a:pPr algn="l">
+              <a:lnSpc>
+                <a:spcPct val="105000"/>
+              </a:lnSpc>
+              <a:spcAft>
+                <a:spcPts val="0"/>
+              </a:spcAft>
+            </a:pPr>
+            <a:r>
+              <a:rPr sz="950" b="1" i="0">
+                <a:solidFill>
+                  <a:srgbClr val="C2410C"/>
+                </a:solidFill>
+                <a:latin typeface="Arial"/>
+              </a:rPr>
+              <a:t>Проверка, что это не случайность. </a:t>
+            </a:r>
+            <a:r>
+              <a:rPr sz="950" b="0" i="0">
+                <a:solidFill>
+                  <a:srgbClr val="27272A"/>
+                </a:solidFill>
+                <a:latin typeface="Arial"/>
+              </a:rPr>
+              <a:t>5000 раз перевыбрал тестовые ролики: ансамбль лучше OCEAN-AI во всех 5000 случаях, CCC +0.031 (от +0.024 до +0.037), рост у всех пяти черт. По средней ошибке выигрыш надёжный, но маленький: 0.0745 → 0.0726.</a:t>
+            </a:r>
+          </a:p>
+        </p:txBody>
+      </p:sp>
+      <p:sp>
+        <p:nvSpPr>
+          <p:cNvPr id="27" name="Rounded Rectangle 26"/>
+          <p:cNvSpPr/>
+          <p:nvPr/>
+        </p:nvSpPr>
+        <p:spPr>
+          <a:xfrm>
+            <a:off x="6199632" y="5559552"/>
+            <a:ext cx="5440680" cy="804672"/>
+          </a:xfrm>
+          <a:prstGeom prst="roundRect">
+            <a:avLst>
+              <a:gd name="adj" fmla="val 9090"/>
+            </a:avLst>
+          </a:prstGeom>
+          <a:solidFill>
+            <a:srgbClr val="F4F4F5"/>
+          </a:solidFill>
+          <a:ln>
+            <a:noFill/>
+          </a:ln>
+          <a:effectLst/>
+        </p:spPr>
+        <p:style>
+          <a:lnRef idx="1">
+            <a:schemeClr val="accent1"/>
+          </a:lnRef>
+          <a:fillRef idx="3">
+            <a:schemeClr val="accent1"/>
+          </a:fillRef>
+          <a:effectRef idx="2">
+            <a:schemeClr val="accent1"/>
+          </a:effectRef>
+          <a:fontRef idx="minor">
+            <a:schemeClr val="lt1"/>
+          </a:fontRef>
+        </p:style>
+        <p:txBody>
+          <a:bodyPr rtlCol="0" anchor="ctr"/>
+          <a:lstStyle/>
+          <a:p/>
+        </p:txBody>
+      </p:sp>
+      <p:sp>
+        <p:nvSpPr>
+          <p:cNvPr id="28" name="TextBox 27"/>
+          <p:cNvSpPr txBox="1"/>
+          <p:nvPr/>
+        </p:nvSpPr>
+        <p:spPr>
+          <a:xfrm>
+            <a:off x="6364224" y="5596128"/>
+            <a:ext cx="5120640" cy="731520"/>
+          </a:xfrm>
+          <a:prstGeom prst="rect">
+            <a:avLst/>
+          </a:prstGeom>
+          <a:noFill/>
+        </p:spPr>
+        <p:txBody>
+          <a:bodyPr wrap="square" anchor="ctr" lIns="0" rIns="0" tIns="0" bIns="0">
+            <a:spAutoFit/>
+          </a:bodyPr>
+          <a:lstStyle/>
+          <a:p>
+            <a:pPr algn="l">
+              <a:lnSpc>
+                <a:spcPct val="105000"/>
+              </a:lnSpc>
+              <a:spcAft>
+                <a:spcPts val="0"/>
+              </a:spcAft>
+            </a:pPr>
+            <a:r>
+              <a:rPr sz="950" b="1" i="0">
+                <a:solidFill>
+                  <a:srgbClr val="C2410C"/>
+                </a:solidFill>
+                <a:latin typeface="Arial"/>
+              </a:rPr>
+              <a:t>Чего эти цифры не говорят. </a:t>
+            </a:r>
+            <a:r>
+              <a:rPr sz="950" b="0" i="0">
+                <a:solidFill>
+                  <a:srgbClr val="27272A"/>
+                </a:solidFill>
+                <a:latin typeface="Arial"/>
+              </a:rPr>
+              <a:t>Это английские 15-секундные ролики с расшифровками речи, сделанными людьми; в программе расшифровка от Whisper и описания от Qwen2.5-VL стоят 0.1–0.3 п.п. точности. Для русской речи основная оценка сейчас — OCEAN-AI с весами MuPTA, моя модель — второе мнение.</a:t>
+            </a:r>
+          </a:p>
+        </p:txBody>
+      </p:sp>
+      <p:sp>
+        <p:nvSpPr>
+          <p:cNvPr id="29" name="TextBox 28"/>
+          <p:cNvSpPr txBox="1"/>
+          <p:nvPr/>
+        </p:nvSpPr>
+        <p:spPr>
+          <a:xfrm>
+            <a:off x="548640" y="6446520"/>
+            <a:ext cx="8686800" cy="274320"/>
+          </a:xfrm>
+          <a:prstGeom prst="rect">
+            <a:avLst/>
+          </a:prstGeom>
+          <a:noFill/>
+        </p:spPr>
+        <p:txBody>
+          <a:bodyPr wrap="square" anchor="t" lIns="0" rIns="0" tIns="0" bIns="0">
+            <a:spAutoFit/>
+          </a:bodyPr>
+          <a:lstStyle/>
+          <a:p>
+            <a:pPr algn="l">
+              <a:lnSpc>
+                <a:spcPct val="110000"/>
+              </a:lnSpc>
+              <a:spcAft>
+                <a:spcPts val="0"/>
+              </a:spcAft>
+            </a:pPr>
+            <a:r>
+              <a:rPr sz="900" b="0" i="0">
+                <a:solidFill>
+                  <a:srgbClr val="71717A"/>
+                </a:solidFill>
+                <a:latin typeface="Arial"/>
+              </a:rPr>
+              <a:t>BS 2.0 · анализ человека по видео · сделано в Claude Code, модель Fable 5.1, режим Ultracode · © 2026 AMLAI</a:t>
+            </a:r>
+          </a:p>
+        </p:txBody>
+      </p:sp>
+    </p:spTree>
+  </p:cSld>
+  <p:clrMapOvr>
+    <a:masterClrMapping/>
+  </p:clrMapOvr>
+</p:sld>
+</file>
+
+<file path=ppt/slides/slide7.xml><?xml version="1.0" encoding="utf-8"?>
+<p:sld xmlns:a="http://schemas.openxmlformats.org/drawingml/2006/main" xmlns:p="http://schemas.openxmlformats.org/presentationml/2006/main" xmlns:r="http://schemas.openxmlformats.org/officeDocument/2006/relationships">
+  <p:cSld>
+    <p:bg>
+      <p:bgPr>
+        <a:solidFill>
+          <a:srgbClr val="FFFFFF"/>
+        </a:solidFill>
+        <a:effectLst/>
+      </p:bgPr>
+    </p:bg>
+    <p:spTree>
+      <p:nvGrpSpPr>
+        <p:cNvPr id="1" name=""/>
+        <p:cNvGrpSpPr/>
+        <p:nvPr/>
+      </p:nvGrpSpPr>
+      <p:grpSpPr/>
+      <p:sp>
+        <p:nvSpPr>
+          <p:cNvPr id="2" name="TextBox 1"/>
+          <p:cNvSpPr txBox="1"/>
+          <p:nvPr/>
+        </p:nvSpPr>
+        <p:spPr>
+          <a:xfrm>
+            <a:off x="548640" y="320040"/>
+            <a:ext cx="11064240" cy="640080"/>
+          </a:xfrm>
+          <a:prstGeom prst="rect">
+            <a:avLst/>
+          </a:prstGeom>
+          <a:noFill/>
+        </p:spPr>
+        <p:txBody>
+          <a:bodyPr wrap="square" anchor="t" lIns="0" rIns="0" tIns="0" bIns="0">
+            <a:spAutoFit/>
+          </a:bodyPr>
+          <a:lstStyle/>
+          <a:p>
+            <a:pPr algn="l">
+              <a:lnSpc>
+                <a:spcPct val="110000"/>
+              </a:lnSpc>
+              <a:spcAft>
+                <a:spcPts val="0"/>
+              </a:spcAft>
+            </a:pPr>
+            <a:r>
+              <a:rPr sz="3200" b="1" i="0">
+                <a:solidFill>
+                  <a:srgbClr val="27272A"/>
+                </a:solidFill>
+                <a:latin typeface="Arial"/>
+              </a:rPr>
+              <a:t>OCEAN-AI: как она смотрит ролик</a:t>
+            </a:r>
+          </a:p>
+        </p:txBody>
+      </p:sp>
+      <p:sp>
+        <p:nvSpPr>
+          <p:cNvPr id="3" name="TextBox 2"/>
+          <p:cNvSpPr txBox="1"/>
+          <p:nvPr/>
+        </p:nvSpPr>
+        <p:spPr>
+          <a:xfrm>
+            <a:off x="548640" y="932688"/>
+            <a:ext cx="11064240" cy="365760"/>
+          </a:xfrm>
+          <a:prstGeom prst="rect">
+            <a:avLst/>
+          </a:prstGeom>
+          <a:noFill/>
+        </p:spPr>
+        <p:txBody>
+          <a:bodyPr wrap="square" anchor="t" lIns="0" rIns="0" tIns="0" bIns="0">
+            <a:spAutoFit/>
+          </a:bodyPr>
+          <a:lstStyle/>
+          <a:p>
+            <a:pPr algn="l">
+              <a:lnSpc>
+                <a:spcPct val="110000"/>
+              </a:lnSpc>
+              <a:spcAft>
+                <a:spcPts val="0"/>
+              </a:spcAft>
+            </a:pPr>
+            <a:r>
+              <a:rPr sz="1300" b="0" i="0">
+                <a:solidFill>
+                  <a:srgbClr val="52525B"/>
+                </a:solidFill>
+                <a:latin typeface="Arial"/>
+              </a:rPr>
+              <a:t>Готовая система авторов из СПб ФИЦ РАН: ролик раскладывается на кадры, звук и текст, у каждого потока своя сеть, в конце — слияние</a:t>
+            </a:r>
+          </a:p>
+        </p:txBody>
+      </p:sp>
+      <p:sp>
+        <p:nvSpPr>
+          <p:cNvPr id="4" name="Rounded Rectangle 3"/>
+          <p:cNvSpPr/>
+          <p:nvPr/>
+        </p:nvSpPr>
+        <p:spPr>
+          <a:xfrm>
+            <a:off x="548640" y="1481328"/>
+            <a:ext cx="1051560" cy="603504"/>
+          </a:xfrm>
+          <a:prstGeom prst="roundRect">
+            <a:avLst>
+              <a:gd name="adj" fmla="val 12121"/>
+            </a:avLst>
+          </a:prstGeom>
+          <a:solidFill>
+            <a:srgbClr val="1D4ED8"/>
+          </a:solidFill>
+          <a:ln>
+            <a:noFill/>
+          </a:ln>
+          <a:effectLst/>
+        </p:spPr>
+        <p:style>
+          <a:lnRef idx="1">
+            <a:schemeClr val="accent1"/>
+          </a:lnRef>
+          <a:fillRef idx="3">
+            <a:schemeClr val="accent1"/>
+          </a:fillRef>
+          <a:effectRef idx="2">
+            <a:schemeClr val="accent1"/>
+          </a:effectRef>
+          <a:fontRef idx="minor">
+            <a:schemeClr val="lt1"/>
+          </a:fontRef>
+        </p:style>
+        <p:txBody>
+          <a:bodyPr rtlCol="0" anchor="ctr"/>
+          <a:lstStyle/>
+          <a:p/>
+        </p:txBody>
+      </p:sp>
+      <p:sp>
+        <p:nvSpPr>
+          <p:cNvPr id="5" name="TextBox 4"/>
+          <p:cNvSpPr txBox="1"/>
+          <p:nvPr/>
+        </p:nvSpPr>
+        <p:spPr>
+          <a:xfrm>
+            <a:off x="621792" y="1481328"/>
+            <a:ext cx="905255" cy="603504"/>
+          </a:xfrm>
+          <a:prstGeom prst="rect">
+            <a:avLst/>
+          </a:prstGeom>
+          <a:noFill/>
+        </p:spPr>
+        <p:txBody>
+          <a:bodyPr wrap="square" anchor="ctr" lIns="0" rIns="0" tIns="0" bIns="0">
+            <a:spAutoFit/>
+          </a:bodyPr>
+          <a:lstStyle/>
+          <a:p>
+            <a:pPr algn="ctr">
+              <a:lnSpc>
+                <a:spcPct val="100000"/>
+              </a:lnSpc>
+              <a:spcAft>
+                <a:spcPts val="0"/>
+              </a:spcAft>
+            </a:pPr>
+            <a:r>
+              <a:rPr sz="1200" b="1" i="0">
+                <a:solidFill>
+                  <a:srgbClr val="FFFFFF"/>
+                </a:solidFill>
+                <a:latin typeface="Arial"/>
+              </a:rPr>
+              <a:t>Лицо</a:t>
+            </a:r>
+          </a:p>
+        </p:txBody>
+      </p:sp>
+      <p:sp>
+        <p:nvSpPr>
+          <p:cNvPr id="6" name="Rounded Rectangle 5"/>
+          <p:cNvSpPr/>
+          <p:nvPr/>
+        </p:nvSpPr>
+        <p:spPr>
+          <a:xfrm>
+            <a:off x="1783080" y="1481328"/>
+            <a:ext cx="2240280" cy="603504"/>
+          </a:xfrm>
+          <a:prstGeom prst="roundRect">
+            <a:avLst>
+              <a:gd name="adj" fmla="val 12121"/>
+            </a:avLst>
+          </a:prstGeom>
+          <a:solidFill>
+            <a:srgbClr val="F4F4F5"/>
+          </a:solidFill>
+          <a:ln>
+            <a:noFill/>
+          </a:ln>
+          <a:effectLst/>
+        </p:spPr>
+        <p:style>
+          <a:lnRef idx="1">
+            <a:schemeClr val="accent1"/>
+          </a:lnRef>
+          <a:fillRef idx="3">
+            <a:schemeClr val="accent1"/>
+          </a:fillRef>
+          <a:effectRef idx="2">
+            <a:schemeClr val="accent1"/>
+          </a:effectRef>
+          <a:fontRef idx="minor">
+            <a:schemeClr val="lt1"/>
+          </a:fontRef>
+        </p:style>
+        <p:txBody>
+          <a:bodyPr rtlCol="0" anchor="ctr"/>
+          <a:lstStyle/>
+          <a:p/>
+        </p:txBody>
+      </p:sp>
+      <p:sp>
+        <p:nvSpPr>
+          <p:cNvPr id="7" name="TextBox 6"/>
+          <p:cNvSpPr txBox="1"/>
+          <p:nvPr/>
+        </p:nvSpPr>
+        <p:spPr>
+          <a:xfrm>
+            <a:off x="1856231" y="1481328"/>
+            <a:ext cx="2093976" cy="603504"/>
+          </a:xfrm>
+          <a:prstGeom prst="rect">
+            <a:avLst/>
+          </a:prstGeom>
+          <a:noFill/>
+        </p:spPr>
+        <p:txBody>
+          <a:bodyPr wrap="square" anchor="ctr" lIns="0" rIns="0" tIns="0" bIns="0">
+            <a:spAutoFit/>
+          </a:bodyPr>
+          <a:lstStyle/>
+          <a:p>
+            <a:pPr algn="ctr">
+              <a:lnSpc>
+                <a:spcPct val="100000"/>
+              </a:lnSpc>
+              <a:spcAft>
+                <a:spcPts val="0"/>
+              </a:spcAft>
+            </a:pPr>
+            <a:r>
+              <a:rPr sz="950" b="0" i="0">
+                <a:solidFill>
+                  <a:srgbClr val="27272A"/>
+                </a:solidFill>
+                <a:latin typeface="Arial"/>
+              </a:rPr>
+              <a:t>5 кадров в секунду → 468 точек лица (MediaPipe FaceMesh)</a:t>
+            </a:r>
+          </a:p>
+        </p:txBody>
+      </p:sp>
+      <p:sp>
+        <p:nvSpPr>
+          <p:cNvPr id="8" name="Rounded Rectangle 7"/>
+          <p:cNvSpPr/>
+          <p:nvPr/>
+        </p:nvSpPr>
+        <p:spPr>
+          <a:xfrm>
+            <a:off x="4206240" y="1481328"/>
+            <a:ext cx="2514600" cy="603504"/>
+          </a:xfrm>
+          <a:prstGeom prst="roundRect">
+            <a:avLst>
+              <a:gd name="adj" fmla="val 12121"/>
+            </a:avLst>
+          </a:prstGeom>
+          <a:solidFill>
+            <a:srgbClr val="F4F4F5"/>
+          </a:solidFill>
+          <a:ln>
+            <a:noFill/>
+          </a:ln>
+          <a:effectLst/>
+        </p:spPr>
+        <p:style>
+          <a:lnRef idx="1">
+            <a:schemeClr val="accent1"/>
+          </a:lnRef>
+          <a:fillRef idx="3">
+            <a:schemeClr val="accent1"/>
+          </a:fillRef>
+          <a:effectRef idx="2">
+            <a:schemeClr val="accent1"/>
+          </a:effectRef>
+          <a:fontRef idx="minor">
+            <a:schemeClr val="lt1"/>
+          </a:fontRef>
+        </p:style>
+        <p:txBody>
+          <a:bodyPr rtlCol="0" anchor="ctr"/>
+          <a:lstStyle/>
+          <a:p/>
+        </p:txBody>
+      </p:sp>
+      <p:sp>
+        <p:nvSpPr>
+          <p:cNvPr id="9" name="TextBox 8"/>
+          <p:cNvSpPr txBox="1"/>
+          <p:nvPr/>
+        </p:nvSpPr>
+        <p:spPr>
+          <a:xfrm>
+            <a:off x="4279392" y="1481328"/>
+            <a:ext cx="2368296" cy="603504"/>
+          </a:xfrm>
+          <a:prstGeom prst="rect">
+            <a:avLst/>
+          </a:prstGeom>
+          <a:noFill/>
+        </p:spPr>
+        <p:txBody>
+          <a:bodyPr wrap="square" anchor="ctr" lIns="0" rIns="0" tIns="0" bIns="0">
+            <a:spAutoFit/>
+          </a:bodyPr>
+          <a:lstStyle/>
+          <a:p>
+            <a:pPr algn="ctr">
+              <a:lnSpc>
+                <a:spcPct val="100000"/>
+              </a:lnSpc>
+              <a:spcAft>
+                <a:spcPts val="0"/>
+              </a:spcAft>
+            </a:pPr>
+            <a:r>
+              <a:rPr sz="950" b="0" i="0">
+                <a:solidFill>
+                  <a:srgbClr val="27272A"/>
+                </a:solidFill>
+                <a:latin typeface="Arial"/>
+              </a:rPr>
+              <a:t>расстояния между точками + картинка лица через ResNet50</a:t>
+            </a:r>
+          </a:p>
+        </p:txBody>
+      </p:sp>
+      <p:sp>
+        <p:nvSpPr>
+          <p:cNvPr id="10" name="Rounded Rectangle 9"/>
+          <p:cNvSpPr/>
+          <p:nvPr/>
+        </p:nvSpPr>
+        <p:spPr>
+          <a:xfrm>
+            <a:off x="6903720" y="1481328"/>
+            <a:ext cx="1874519" cy="603504"/>
+          </a:xfrm>
+          <a:prstGeom prst="roundRect">
+            <a:avLst>
+              <a:gd name="adj" fmla="val 12121"/>
+            </a:avLst>
+          </a:prstGeom>
+          <a:solidFill>
+            <a:srgbClr val="DBEAFE"/>
+          </a:solidFill>
+          <a:ln>
+            <a:noFill/>
+          </a:ln>
+          <a:effectLst/>
+        </p:spPr>
+        <p:style>
+          <a:lnRef idx="1">
+            <a:schemeClr val="accent1"/>
+          </a:lnRef>
+          <a:fillRef idx="3">
+            <a:schemeClr val="accent1"/>
+          </a:fillRef>
+          <a:effectRef idx="2">
+            <a:schemeClr val="accent1"/>
+          </a:effectRef>
+          <a:fontRef idx="minor">
+            <a:schemeClr val="lt1"/>
+          </a:fontRef>
+        </p:style>
+        <p:txBody>
+          <a:bodyPr rtlCol="0" anchor="ctr"/>
+          <a:lstStyle/>
+          <a:p/>
+        </p:txBody>
+      </p:sp>
+      <p:sp>
+        <p:nvSpPr>
+          <p:cNvPr id="11" name="TextBox 10"/>
+          <p:cNvSpPr txBox="1"/>
+          <p:nvPr/>
+        </p:nvSpPr>
+        <p:spPr>
+          <a:xfrm>
+            <a:off x="6976872" y="1481328"/>
+            <a:ext cx="1728216" cy="603504"/>
+          </a:xfrm>
+          <a:prstGeom prst="rect">
+            <a:avLst/>
+          </a:prstGeom>
+          <a:noFill/>
+        </p:spPr>
+        <p:txBody>
+          <a:bodyPr wrap="square" anchor="ctr" lIns="0" rIns="0" tIns="0" bIns="0">
+            <a:spAutoFit/>
+          </a:bodyPr>
+          <a:lstStyle/>
+          <a:p>
+            <a:pPr algn="ctr">
+              <a:lnSpc>
+                <a:spcPct val="100000"/>
+              </a:lnSpc>
+              <a:spcAft>
+                <a:spcPts val="0"/>
+              </a:spcAft>
+            </a:pPr>
+            <a:r>
+              <a:rPr sz="950" b="0" i="0">
+                <a:solidFill>
+                  <a:srgbClr val="27272A"/>
+                </a:solidFill>
+                <a:latin typeface="Arial"/>
+              </a:rPr>
+              <a:t>LSTM по окнам 2 с: видит, как меняется мимика</a:t>
+            </a:r>
+          </a:p>
+          <a:p>
+            <a:pPr algn="ctr">
+              <a:lnSpc>
+                <a:spcPct val="100000"/>
+              </a:lnSpc>
+              <a:spcAft>
+                <a:spcPts val="0"/>
+              </a:spcAft>
+            </a:pPr>
+            <a:r>
+              <a:rPr sz="800" b="0" i="0">
+                <a:solidFill>
+                  <a:srgbClr val="52525B"/>
+                </a:solidFill>
+                <a:latin typeface="Arial"/>
+              </a:rPr>
+              <a:t>готовые веса</a:t>
+            </a:r>
+          </a:p>
+        </p:txBody>
+      </p:sp>
+      <p:cxnSp>
+        <p:nvCxnSpPr>
+          <p:cNvPr id="12" name="Connector 11"/>
+          <p:cNvCxnSpPr/>
+          <p:nvPr/>
+        </p:nvCxnSpPr>
+        <p:spPr>
+          <a:xfrm>
+            <a:off x="1627632" y="1783080"/>
+            <a:ext cx="128016" cy="0"/>
+          </a:xfrm>
+          <a:prstGeom prst="line">
+            <a:avLst/>
+          </a:prstGeom>
+          <a:ln w="19050">
+            <a:solidFill>
+              <a:srgbClr val="71717A"/>
+            </a:solidFill>
+            <a:tailEnd type="triangle" w="med" len="med"/>
+          </a:ln>
+        </p:spPr>
+        <p:style>
+          <a:lnRef idx="2">
+            <a:schemeClr val="accent1"/>
+          </a:lnRef>
+          <a:fillRef idx="0">
+            <a:schemeClr val="accent1"/>
+          </a:fillRef>
+          <a:effectRef idx="1">
+            <a:schemeClr val="accent1"/>
+          </a:effectRef>
+          <a:fontRef idx="minor">
+            <a:schemeClr val="tx1"/>
+          </a:fontRef>
+        </p:style>
+      </p:cxnSp>
+      <p:cxnSp>
+        <p:nvCxnSpPr>
+          <p:cNvPr id="13" name="Connector 12"/>
+          <p:cNvCxnSpPr/>
+          <p:nvPr/>
+        </p:nvCxnSpPr>
+        <p:spPr>
+          <a:xfrm>
+            <a:off x="4050792" y="1783080"/>
+            <a:ext cx="128015" cy="0"/>
+          </a:xfrm>
+          <a:prstGeom prst="line">
+            <a:avLst/>
+          </a:prstGeom>
+          <a:ln w="19050">
+            <a:solidFill>
+              <a:srgbClr val="71717A"/>
+            </a:solidFill>
+            <a:tailEnd type="triangle" w="med" len="med"/>
+          </a:ln>
+        </p:spPr>
+        <p:style>
+          <a:lnRef idx="2">
+            <a:schemeClr val="accent1"/>
+          </a:lnRef>
+          <a:fillRef idx="0">
+            <a:schemeClr val="accent1"/>
+          </a:fillRef>
+          <a:effectRef idx="1">
+            <a:schemeClr val="accent1"/>
+          </a:effectRef>
+          <a:fontRef idx="minor">
+            <a:schemeClr val="tx1"/>
+          </a:fontRef>
+        </p:style>
+      </p:cxnSp>
+      <p:cxnSp>
+        <p:nvCxnSpPr>
+          <p:cNvPr id="14" name="Connector 13"/>
+          <p:cNvCxnSpPr/>
+          <p:nvPr/>
+        </p:nvCxnSpPr>
+        <p:spPr>
+          <a:xfrm>
+            <a:off x="6748272" y="1783080"/>
+            <a:ext cx="128016" cy="0"/>
+          </a:xfrm>
+          <a:prstGeom prst="line">
+            <a:avLst/>
+          </a:prstGeom>
+          <a:ln w="19050">
+            <a:solidFill>
+              <a:srgbClr val="71717A"/>
+            </a:solidFill>
+            <a:tailEnd type="triangle" w="med" len="med"/>
+          </a:ln>
+        </p:spPr>
+        <p:style>
+          <a:lnRef idx="2">
+            <a:schemeClr val="accent1"/>
+          </a:lnRef>
+          <a:fillRef idx="0">
+            <a:schemeClr val="accent1"/>
+          </a:fillRef>
+          <a:effectRef idx="1">
+            <a:schemeClr val="accent1"/>
+          </a:effectRef>
+          <a:fontRef idx="minor">
+            <a:schemeClr val="tx1"/>
+          </a:fontRef>
+        </p:style>
+      </p:cxnSp>
+      <p:cxnSp>
+        <p:nvCxnSpPr>
+          <p:cNvPr id="15" name="Connector 14"/>
+          <p:cNvCxnSpPr/>
+          <p:nvPr/>
+        </p:nvCxnSpPr>
+        <p:spPr>
+          <a:xfrm>
+            <a:off x="8805672" y="1783080"/>
+            <a:ext cx="219456" cy="0"/>
+          </a:xfrm>
+          <a:prstGeom prst="line">
+            <a:avLst/>
+          </a:prstGeom>
+          <a:ln w="19050">
+            <a:solidFill>
+              <a:srgbClr val="71717A"/>
+            </a:solidFill>
+            <a:tailEnd type="triangle" w="med" len="med"/>
+          </a:ln>
+        </p:spPr>
+        <p:style>
+          <a:lnRef idx="2">
+            <a:schemeClr val="accent1"/>
+          </a:lnRef>
+          <a:fillRef idx="0">
+            <a:schemeClr val="accent1"/>
+          </a:fillRef>
+          <a:effectRef idx="1">
+            <a:schemeClr val="accent1"/>
+          </a:effectRef>
+          <a:fontRef idx="minor">
+            <a:schemeClr val="tx1"/>
+          </a:fontRef>
+        </p:style>
+      </p:cxnSp>
+      <p:sp>
+        <p:nvSpPr>
+          <p:cNvPr id="16" name="Rounded Rectangle 15"/>
+          <p:cNvSpPr/>
+          <p:nvPr/>
+        </p:nvSpPr>
+        <p:spPr>
+          <a:xfrm>
+            <a:off x="548640" y="2231136"/>
+            <a:ext cx="1051560" cy="603504"/>
+          </a:xfrm>
+          <a:prstGeom prst="roundRect">
+            <a:avLst>
+              <a:gd name="adj" fmla="val 12121"/>
+            </a:avLst>
+          </a:prstGeom>
+          <a:solidFill>
+            <a:srgbClr val="0F766E"/>
+          </a:solidFill>
+          <a:ln>
+            <a:noFill/>
+          </a:ln>
+          <a:effectLst/>
+        </p:spPr>
+        <p:style>
+          <a:lnRef idx="1">
+            <a:schemeClr val="accent1"/>
+          </a:lnRef>
+          <a:fillRef idx="3">
+            <a:schemeClr val="accent1"/>
+          </a:fillRef>
+          <a:effectRef idx="2">
+            <a:schemeClr val="accent1"/>
+          </a:effectRef>
+          <a:fontRef idx="minor">
+            <a:schemeClr val="lt1"/>
+          </a:fontRef>
+        </p:style>
+        <p:txBody>
+          <a:bodyPr rtlCol="0" anchor="ctr"/>
+          <a:lstStyle/>
+          <a:p/>
+        </p:txBody>
+      </p:sp>
+      <p:sp>
+        <p:nvSpPr>
+          <p:cNvPr id="17" name="TextBox 16"/>
+          <p:cNvSpPr txBox="1"/>
+          <p:nvPr/>
+        </p:nvSpPr>
+        <p:spPr>
+          <a:xfrm>
+            <a:off x="621792" y="2231136"/>
+            <a:ext cx="905255" cy="603504"/>
+          </a:xfrm>
+          <a:prstGeom prst="rect">
+            <a:avLst/>
+          </a:prstGeom>
+          <a:noFill/>
+        </p:spPr>
+        <p:txBody>
+          <a:bodyPr wrap="square" anchor="ctr" lIns="0" rIns="0" tIns="0" bIns="0">
+            <a:spAutoFit/>
+          </a:bodyPr>
+          <a:lstStyle/>
+          <a:p>
+            <a:pPr algn="ctr">
+              <a:lnSpc>
+                <a:spcPct val="100000"/>
+              </a:lnSpc>
+              <a:spcAft>
+                <a:spcPts val="0"/>
+              </a:spcAft>
+            </a:pPr>
+            <a:r>
+              <a:rPr sz="1200" b="1" i="0">
+                <a:solidFill>
+                  <a:srgbClr val="FFFFFF"/>
+                </a:solidFill>
+                <a:latin typeface="Arial"/>
+              </a:rPr>
+              <a:t>Голос</a:t>
+            </a:r>
+          </a:p>
+        </p:txBody>
+      </p:sp>
+      <p:sp>
+        <p:nvSpPr>
+          <p:cNvPr id="18" name="Rounded Rectangle 17"/>
+          <p:cNvSpPr/>
+          <p:nvPr/>
+        </p:nvSpPr>
+        <p:spPr>
+          <a:xfrm>
+            <a:off x="1783080" y="2231136"/>
+            <a:ext cx="2240280" cy="603504"/>
+          </a:xfrm>
+          <a:prstGeom prst="roundRect">
+            <a:avLst>
+              <a:gd name="adj" fmla="val 12121"/>
+            </a:avLst>
+          </a:prstGeom>
+          <a:solidFill>
+            <a:srgbClr val="F4F4F5"/>
+          </a:solidFill>
+          <a:ln>
+            <a:noFill/>
+          </a:ln>
+          <a:effectLst/>
+        </p:spPr>
+        <p:style>
+          <a:lnRef idx="1">
+            <a:schemeClr val="accent1"/>
+          </a:lnRef>
+          <a:fillRef idx="3">
+            <a:schemeClr val="accent1"/>
+          </a:fillRef>
+          <a:effectRef idx="2">
+            <a:schemeClr val="accent1"/>
+          </a:effectRef>
+          <a:fontRef idx="minor">
+            <a:schemeClr val="lt1"/>
+          </a:fontRef>
+        </p:style>
+        <p:txBody>
+          <a:bodyPr rtlCol="0" anchor="ctr"/>
+          <a:lstStyle/>
+          <a:p/>
+        </p:txBody>
+      </p:sp>
+      <p:sp>
+        <p:nvSpPr>
+          <p:cNvPr id="19" name="TextBox 18"/>
+          <p:cNvSpPr txBox="1"/>
+          <p:nvPr/>
+        </p:nvSpPr>
+        <p:spPr>
+          <a:xfrm>
+            <a:off x="1856231" y="2231136"/>
+            <a:ext cx="2093976" cy="603504"/>
+          </a:xfrm>
+          <a:prstGeom prst="rect">
+            <a:avLst/>
+          </a:prstGeom>
+          <a:noFill/>
+        </p:spPr>
+        <p:txBody>
+          <a:bodyPr wrap="square" anchor="ctr" lIns="0" rIns="0" tIns="0" bIns="0">
+            <a:spAutoFit/>
+          </a:bodyPr>
+          <a:lstStyle/>
+          <a:p>
+            <a:pPr algn="ctr">
+              <a:lnSpc>
+                <a:spcPct val="100000"/>
+              </a:lnSpc>
+              <a:spcAft>
+                <a:spcPts val="0"/>
+              </a:spcAft>
+            </a:pPr>
+            <a:r>
+              <a:rPr sz="950" b="0" i="0">
+                <a:solidFill>
+                  <a:srgbClr val="27272A"/>
+                </a:solidFill>
+                <a:latin typeface="Arial"/>
+              </a:rPr>
+              <a:t>звук ролика</a:t>
+            </a:r>
+          </a:p>
+        </p:txBody>
+      </p:sp>
+      <p:sp>
+        <p:nvSpPr>
+          <p:cNvPr id="20" name="Rounded Rectangle 19"/>
+          <p:cNvSpPr/>
+          <p:nvPr/>
+        </p:nvSpPr>
+        <p:spPr>
+          <a:xfrm>
+            <a:off x="4206240" y="2231136"/>
+            <a:ext cx="2514600" cy="603504"/>
+          </a:xfrm>
+          <a:prstGeom prst="roundRect">
+            <a:avLst>
+              <a:gd name="adj" fmla="val 12121"/>
+            </a:avLst>
+          </a:prstGeom>
+          <a:solidFill>
+            <a:srgbClr val="F4F4F5"/>
+          </a:solidFill>
+          <a:ln>
+            <a:noFill/>
+          </a:ln>
+          <a:effectLst/>
+        </p:spPr>
+        <p:style>
+          <a:lnRef idx="1">
+            <a:schemeClr val="accent1"/>
+          </a:lnRef>
+          <a:fillRef idx="3">
+            <a:schemeClr val="accent1"/>
+          </a:fillRef>
+          <a:effectRef idx="2">
+            <a:schemeClr val="accent1"/>
+          </a:effectRef>
+          <a:fontRef idx="minor">
+            <a:schemeClr val="lt1"/>
+          </a:fontRef>
+        </p:style>
+        <p:txBody>
+          <a:bodyPr rtlCol="0" anchor="ctr"/>
+          <a:lstStyle/>
+          <a:p/>
+        </p:txBody>
+      </p:sp>
+      <p:sp>
+        <p:nvSpPr>
+          <p:cNvPr id="21" name="TextBox 20"/>
+          <p:cNvSpPr txBox="1"/>
+          <p:nvPr/>
+        </p:nvSpPr>
+        <p:spPr>
+          <a:xfrm>
+            <a:off x="4279392" y="2231136"/>
+            <a:ext cx="2368296" cy="603504"/>
+          </a:xfrm>
+          <a:prstGeom prst="rect">
+            <a:avLst/>
+          </a:prstGeom>
+          <a:noFill/>
+        </p:spPr>
+        <p:txBody>
+          <a:bodyPr wrap="square" anchor="ctr" lIns="0" rIns="0" tIns="0" bIns="0">
+            <a:spAutoFit/>
+          </a:bodyPr>
+          <a:lstStyle/>
+          <a:p>
+            <a:pPr algn="ctr">
+              <a:lnSpc>
+                <a:spcPct val="100000"/>
+              </a:lnSpc>
+              <a:spcAft>
+                <a:spcPts val="0"/>
+              </a:spcAft>
+            </a:pPr>
+            <a:r>
+              <a:rPr sz="950" b="0" i="0">
+                <a:solidFill>
+                  <a:srgbClr val="27272A"/>
+                </a:solidFill>
+                <a:latin typeface="Arial"/>
+              </a:rPr>
+              <a:t>openSMILE (высота, громкость, тембр) + спектрограмма</a:t>
+            </a:r>
+          </a:p>
+        </p:txBody>
+      </p:sp>
+      <p:sp>
+        <p:nvSpPr>
+          <p:cNvPr id="22" name="Rounded Rectangle 21"/>
+          <p:cNvSpPr/>
+          <p:nvPr/>
+        </p:nvSpPr>
+        <p:spPr>
+          <a:xfrm>
+            <a:off x="6903720" y="2231136"/>
+            <a:ext cx="1874519" cy="603504"/>
+          </a:xfrm>
+          <a:prstGeom prst="roundRect">
+            <a:avLst>
+              <a:gd name="adj" fmla="val 12121"/>
+            </a:avLst>
+          </a:prstGeom>
+          <a:solidFill>
+            <a:srgbClr val="DBEAFE"/>
+          </a:solidFill>
+          <a:ln>
+            <a:noFill/>
+          </a:ln>
+          <a:effectLst/>
+        </p:spPr>
+        <p:style>
+          <a:lnRef idx="1">
+            <a:schemeClr val="accent1"/>
+          </a:lnRef>
+          <a:fillRef idx="3">
+            <a:schemeClr val="accent1"/>
+          </a:fillRef>
+          <a:effectRef idx="2">
+            <a:schemeClr val="accent1"/>
+          </a:effectRef>
+          <a:fontRef idx="minor">
+            <a:schemeClr val="lt1"/>
+          </a:fontRef>
+        </p:style>
+        <p:txBody>
+          <a:bodyPr rtlCol="0" anchor="ctr"/>
+          <a:lstStyle/>
+          <a:p/>
+        </p:txBody>
+      </p:sp>
+      <p:sp>
+        <p:nvSpPr>
+          <p:cNvPr id="23" name="TextBox 22"/>
+          <p:cNvSpPr txBox="1"/>
+          <p:nvPr/>
+        </p:nvSpPr>
+        <p:spPr>
+          <a:xfrm>
+            <a:off x="6976872" y="2231136"/>
+            <a:ext cx="1728216" cy="603504"/>
+          </a:xfrm>
+          <a:prstGeom prst="rect">
+            <a:avLst/>
+          </a:prstGeom>
+          <a:noFill/>
+        </p:spPr>
+        <p:txBody>
+          <a:bodyPr wrap="square" anchor="ctr" lIns="0" rIns="0" tIns="0" bIns="0">
+            <a:spAutoFit/>
+          </a:bodyPr>
+          <a:lstStyle/>
+          <a:p>
+            <a:pPr algn="ctr">
+              <a:lnSpc>
+                <a:spcPct val="100000"/>
+              </a:lnSpc>
+              <a:spcAft>
+                <a:spcPts val="0"/>
+              </a:spcAft>
+            </a:pPr>
+            <a:r>
+              <a:rPr sz="950" b="0" i="0">
+                <a:solidFill>
+                  <a:srgbClr val="27272A"/>
+                </a:solidFill>
+                <a:latin typeface="Arial"/>
+              </a:rPr>
+              <a:t>сеть по окнам 2 с</a:t>
+            </a:r>
+          </a:p>
+          <a:p>
+            <a:pPr algn="ctr">
+              <a:lnSpc>
+                <a:spcPct val="100000"/>
+              </a:lnSpc>
+              <a:spcAft>
+                <a:spcPts val="0"/>
+              </a:spcAft>
+            </a:pPr>
+            <a:r>
+              <a:rPr sz="800" b="0" i="0">
+                <a:solidFill>
+                  <a:srgbClr val="52525B"/>
+                </a:solidFill>
+                <a:latin typeface="Arial"/>
+              </a:rPr>
+              <a:t>готовые веса</a:t>
+            </a:r>
+          </a:p>
+        </p:txBody>
+      </p:sp>
+      <p:cxnSp>
+        <p:nvCxnSpPr>
+          <p:cNvPr id="24" name="Connector 23"/>
+          <p:cNvCxnSpPr/>
+          <p:nvPr/>
+        </p:nvCxnSpPr>
+        <p:spPr>
+          <a:xfrm>
+            <a:off x="1627632" y="2532888"/>
+            <a:ext cx="128016" cy="0"/>
+          </a:xfrm>
+          <a:prstGeom prst="line">
+            <a:avLst/>
+          </a:prstGeom>
+          <a:ln w="19050">
+            <a:solidFill>
+              <a:srgbClr val="71717A"/>
+            </a:solidFill>
+            <a:tailEnd type="triangle" w="med" len="med"/>
+          </a:ln>
+        </p:spPr>
+        <p:style>
+          <a:lnRef idx="2">
+            <a:schemeClr val="accent1"/>
+          </a:lnRef>
+          <a:fillRef idx="0">
+            <a:schemeClr val="accent1"/>
+          </a:fillRef>
+          <a:effectRef idx="1">
+            <a:schemeClr val="accent1"/>
+          </a:effectRef>
+          <a:fontRef idx="minor">
+            <a:schemeClr val="tx1"/>
+          </a:fontRef>
+        </p:style>
+      </p:cxnSp>
+      <p:cxnSp>
+        <p:nvCxnSpPr>
+          <p:cNvPr id="25" name="Connector 24"/>
+          <p:cNvCxnSpPr/>
+          <p:nvPr/>
+        </p:nvCxnSpPr>
+        <p:spPr>
+          <a:xfrm>
+            <a:off x="4050792" y="2532888"/>
+            <a:ext cx="128015" cy="0"/>
+          </a:xfrm>
+          <a:prstGeom prst="line">
+            <a:avLst/>
+          </a:prstGeom>
+          <a:ln w="19050">
+            <a:solidFill>
+              <a:srgbClr val="71717A"/>
+            </a:solidFill>
+            <a:tailEnd type="triangle" w="med" len="med"/>
+          </a:ln>
+        </p:spPr>
+        <p:style>
+          <a:lnRef idx="2">
+            <a:schemeClr val="accent1"/>
+          </a:lnRef>
+          <a:fillRef idx="0">
+            <a:schemeClr val="accent1"/>
+          </a:fillRef>
+          <a:effectRef idx="1">
+            <a:schemeClr val="accent1"/>
+          </a:effectRef>
+          <a:fontRef idx="minor">
+            <a:schemeClr val="tx1"/>
+          </a:fontRef>
+        </p:style>
+      </p:cxnSp>
+      <p:cxnSp>
+        <p:nvCxnSpPr>
+          <p:cNvPr id="26" name="Connector 25"/>
+          <p:cNvCxnSpPr/>
+          <p:nvPr/>
+        </p:nvCxnSpPr>
+        <p:spPr>
+          <a:xfrm>
+            <a:off x="6748272" y="2532888"/>
+            <a:ext cx="128016" cy="0"/>
+          </a:xfrm>
+          <a:prstGeom prst="line">
+            <a:avLst/>
+          </a:prstGeom>
+          <a:ln w="19050">
+            <a:solidFill>
+              <a:srgbClr val="71717A"/>
+            </a:solidFill>
+            <a:tailEnd type="triangle" w="med" len="med"/>
+          </a:ln>
+        </p:spPr>
+        <p:style>
+          <a:lnRef idx="2">
+            <a:schemeClr val="accent1"/>
+          </a:lnRef>
+          <a:fillRef idx="0">
+            <a:schemeClr val="accent1"/>
+          </a:fillRef>
+          <a:effectRef idx="1">
+            <a:schemeClr val="accent1"/>
+          </a:effectRef>
+          <a:fontRef idx="minor">
+            <a:schemeClr val="tx1"/>
+          </a:fontRef>
+        </p:style>
+      </p:cxnSp>
+      <p:cxnSp>
+        <p:nvCxnSpPr>
+          <p:cNvPr id="27" name="Connector 26"/>
+          <p:cNvCxnSpPr/>
+          <p:nvPr/>
+        </p:nvCxnSpPr>
+        <p:spPr>
+          <a:xfrm>
+            <a:off x="8805672" y="2532888"/>
+            <a:ext cx="219456" cy="0"/>
+          </a:xfrm>
+          <a:prstGeom prst="line">
+            <a:avLst/>
+          </a:prstGeom>
+          <a:ln w="19050">
+            <a:solidFill>
+              <a:srgbClr val="71717A"/>
+            </a:solidFill>
+            <a:tailEnd type="triangle" w="med" len="med"/>
+          </a:ln>
+        </p:spPr>
+        <p:style>
+          <a:lnRef idx="2">
+            <a:schemeClr val="accent1"/>
+          </a:lnRef>
+          <a:fillRef idx="0">
+            <a:schemeClr val="accent1"/>
+          </a:fillRef>
+          <a:effectRef idx="1">
+            <a:schemeClr val="accent1"/>
+          </a:effectRef>
+          <a:fontRef idx="minor">
+            <a:schemeClr val="tx1"/>
+          </a:fontRef>
+        </p:style>
+      </p:cxnSp>
+      <p:sp>
+        <p:nvSpPr>
+          <p:cNvPr id="28" name="Rounded Rectangle 27"/>
+          <p:cNvSpPr/>
+          <p:nvPr/>
+        </p:nvSpPr>
+        <p:spPr>
+          <a:xfrm>
+            <a:off x="548640" y="2980944"/>
+            <a:ext cx="1051560" cy="603504"/>
+          </a:xfrm>
+          <a:prstGeom prst="roundRect">
+            <a:avLst>
+              <a:gd name="adj" fmla="val 12121"/>
+            </a:avLst>
+          </a:prstGeom>
+          <a:solidFill>
+            <a:srgbClr val="7E22CE"/>
+          </a:solidFill>
+          <a:ln>
+            <a:noFill/>
+          </a:ln>
+          <a:effectLst/>
+        </p:spPr>
+        <p:style>
+          <a:lnRef idx="1">
+            <a:schemeClr val="accent1"/>
+          </a:lnRef>
+          <a:fillRef idx="3">
+            <a:schemeClr val="accent1"/>
+          </a:fillRef>
+          <a:effectRef idx="2">
+            <a:schemeClr val="accent1"/>
+          </a:effectRef>
+          <a:fontRef idx="minor">
+            <a:schemeClr val="lt1"/>
+          </a:fontRef>
+        </p:style>
+        <p:txBody>
+          <a:bodyPr rtlCol="0" anchor="ctr"/>
+          <a:lstStyle/>
+          <a:p/>
+        </p:txBody>
+      </p:sp>
+      <p:sp>
+        <p:nvSpPr>
+          <p:cNvPr id="29" name="TextBox 28"/>
+          <p:cNvSpPr txBox="1"/>
+          <p:nvPr/>
+        </p:nvSpPr>
+        <p:spPr>
+          <a:xfrm>
+            <a:off x="621792" y="2980944"/>
+            <a:ext cx="905255" cy="603504"/>
+          </a:xfrm>
+          <a:prstGeom prst="rect">
+            <a:avLst/>
+          </a:prstGeom>
+          <a:noFill/>
+        </p:spPr>
+        <p:txBody>
+          <a:bodyPr wrap="square" anchor="ctr" lIns="0" rIns="0" tIns="0" bIns="0">
+            <a:spAutoFit/>
+          </a:bodyPr>
+          <a:lstStyle/>
+          <a:p>
+            <a:pPr algn="ctr">
+              <a:lnSpc>
+                <a:spcPct val="100000"/>
+              </a:lnSpc>
+              <a:spcAft>
+                <a:spcPts val="0"/>
+              </a:spcAft>
+            </a:pPr>
+            <a:r>
+              <a:rPr sz="1200" b="1" i="0">
+                <a:solidFill>
+                  <a:srgbClr val="FFFFFF"/>
+                </a:solidFill>
+                <a:latin typeface="Arial"/>
+              </a:rPr>
+              <a:t>Речь</a:t>
+            </a:r>
+          </a:p>
+        </p:txBody>
+      </p:sp>
+      <p:sp>
+        <p:nvSpPr>
+          <p:cNvPr id="30" name="Rounded Rectangle 29"/>
+          <p:cNvSpPr/>
+          <p:nvPr/>
+        </p:nvSpPr>
+        <p:spPr>
+          <a:xfrm>
+            <a:off x="1783080" y="2980944"/>
+            <a:ext cx="2240280" cy="603504"/>
+          </a:xfrm>
+          <a:prstGeom prst="roundRect">
+            <a:avLst>
+              <a:gd name="adj" fmla="val 12121"/>
+            </a:avLst>
+          </a:prstGeom>
+          <a:solidFill>
+            <a:srgbClr val="F4F4F5"/>
+          </a:solidFill>
+          <a:ln>
+            <a:noFill/>
+          </a:ln>
+          <a:effectLst/>
+        </p:spPr>
+        <p:style>
+          <a:lnRef idx="1">
+            <a:schemeClr val="accent1"/>
+          </a:lnRef>
+          <a:fillRef idx="3">
+            <a:schemeClr val="accent1"/>
+          </a:fillRef>
+          <a:effectRef idx="2">
+            <a:schemeClr val="accent1"/>
+          </a:effectRef>
+          <a:fontRef idx="minor">
+            <a:schemeClr val="lt1"/>
+          </a:fontRef>
+        </p:style>
+        <p:txBody>
+          <a:bodyPr rtlCol="0" anchor="ctr"/>
+          <a:lstStyle/>
+          <a:p/>
+        </p:txBody>
+      </p:sp>
+      <p:sp>
+        <p:nvSpPr>
+          <p:cNvPr id="31" name="TextBox 30"/>
+          <p:cNvSpPr txBox="1"/>
+          <p:nvPr/>
+        </p:nvSpPr>
+        <p:spPr>
+          <a:xfrm>
+            <a:off x="1856231" y="2980944"/>
+            <a:ext cx="2093976" cy="603504"/>
+          </a:xfrm>
+          <a:prstGeom prst="rect">
+            <a:avLst/>
+          </a:prstGeom>
+          <a:noFill/>
+        </p:spPr>
+        <p:txBody>
+          <a:bodyPr wrap="square" anchor="ctr" lIns="0" rIns="0" tIns="0" bIns="0">
+            <a:spAutoFit/>
+          </a:bodyPr>
+          <a:lstStyle/>
+          <a:p>
+            <a:pPr algn="ctr">
+              <a:lnSpc>
+                <a:spcPct val="100000"/>
+              </a:lnSpc>
+              <a:spcAft>
+                <a:spcPts val="0"/>
+              </a:spcAft>
+            </a:pPr>
+            <a:r>
+              <a:rPr sz="950" b="0" i="0">
+                <a:solidFill>
+                  <a:srgbClr val="27272A"/>
+                </a:solidFill>
+                <a:latin typeface="Arial"/>
+              </a:rPr>
+              <a:t>Whisper → текст; русский переводится на английский</a:t>
+            </a:r>
+          </a:p>
+        </p:txBody>
+      </p:sp>
+      <p:sp>
+        <p:nvSpPr>
+          <p:cNvPr id="32" name="Rounded Rectangle 31"/>
+          <p:cNvSpPr/>
+          <p:nvPr/>
+        </p:nvSpPr>
+        <p:spPr>
+          <a:xfrm>
+            <a:off x="4206240" y="2980944"/>
+            <a:ext cx="2514600" cy="603504"/>
+          </a:xfrm>
+          <a:prstGeom prst="roundRect">
+            <a:avLst>
+              <a:gd name="adj" fmla="val 12121"/>
+            </a:avLst>
+          </a:prstGeom>
+          <a:solidFill>
+            <a:srgbClr val="F4F4F5"/>
+          </a:solidFill>
+          <a:ln>
+            <a:noFill/>
+          </a:ln>
+          <a:effectLst/>
+        </p:spPr>
+        <p:style>
+          <a:lnRef idx="1">
+            <a:schemeClr val="accent1"/>
+          </a:lnRef>
+          <a:fillRef idx="3">
+            <a:schemeClr val="accent1"/>
+          </a:fillRef>
+          <a:effectRef idx="2">
+            <a:schemeClr val="accent1"/>
+          </a:effectRef>
+          <a:fontRef idx="minor">
+            <a:schemeClr val="lt1"/>
+          </a:fontRef>
+        </p:style>
+        <p:txBody>
+          <a:bodyPr rtlCol="0" anchor="ctr"/>
+          <a:lstStyle/>
+          <a:p/>
+        </p:txBody>
+      </p:sp>
+      <p:sp>
+        <p:nvSpPr>
+          <p:cNvPr id="33" name="TextBox 32"/>
+          <p:cNvSpPr txBox="1"/>
+          <p:nvPr/>
+        </p:nvSpPr>
+        <p:spPr>
+          <a:xfrm>
+            <a:off x="4279392" y="2980944"/>
+            <a:ext cx="2368296" cy="603504"/>
+          </a:xfrm>
+          <a:prstGeom prst="rect">
+            <a:avLst/>
+          </a:prstGeom>
+          <a:noFill/>
+        </p:spPr>
+        <p:txBody>
+          <a:bodyPr wrap="square" anchor="ctr" lIns="0" rIns="0" tIns="0" bIns="0">
+            <a:spAutoFit/>
+          </a:bodyPr>
+          <a:lstStyle/>
+          <a:p>
+            <a:pPr algn="ctr">
+              <a:lnSpc>
+                <a:spcPct val="100000"/>
+              </a:lnSpc>
+              <a:spcAft>
+                <a:spcPts val="0"/>
+              </a:spcAft>
+            </a:pPr>
+            <a:r>
+              <a:rPr sz="950" b="0" i="0">
+                <a:solidFill>
+                  <a:srgbClr val="27272A"/>
+                </a:solidFill>
+                <a:latin typeface="Arial"/>
+              </a:rPr>
+              <a:t>BERT + словарные признаки</a:t>
+            </a:r>
+          </a:p>
+        </p:txBody>
+      </p:sp>
+      <p:sp>
+        <p:nvSpPr>
+          <p:cNvPr id="34" name="Rounded Rectangle 33"/>
+          <p:cNvSpPr/>
+          <p:nvPr/>
+        </p:nvSpPr>
+        <p:spPr>
+          <a:xfrm>
+            <a:off x="6903720" y="2980944"/>
+            <a:ext cx="1874519" cy="603504"/>
+          </a:xfrm>
+          <a:prstGeom prst="roundRect">
+            <a:avLst>
+              <a:gd name="adj" fmla="val 12121"/>
+            </a:avLst>
+          </a:prstGeom>
+          <a:solidFill>
+            <a:srgbClr val="DBEAFE"/>
+          </a:solidFill>
+          <a:ln>
+            <a:noFill/>
+          </a:ln>
+          <a:effectLst/>
+        </p:spPr>
+        <p:style>
+          <a:lnRef idx="1">
+            <a:schemeClr val="accent1"/>
+          </a:lnRef>
+          <a:fillRef idx="3">
+            <a:schemeClr val="accent1"/>
+          </a:fillRef>
+          <a:effectRef idx="2">
+            <a:schemeClr val="accent1"/>
+          </a:effectRef>
+          <a:fontRef idx="minor">
+            <a:schemeClr val="lt1"/>
+          </a:fontRef>
+        </p:style>
+        <p:txBody>
+          <a:bodyPr rtlCol="0" anchor="ctr"/>
+          <a:lstStyle/>
+          <a:p/>
+        </p:txBody>
+      </p:sp>
+      <p:sp>
+        <p:nvSpPr>
+          <p:cNvPr id="35" name="TextBox 34"/>
+          <p:cNvSpPr txBox="1"/>
+          <p:nvPr/>
+        </p:nvSpPr>
+        <p:spPr>
+          <a:xfrm>
+            <a:off x="6976872" y="2980944"/>
+            <a:ext cx="1728216" cy="603504"/>
+          </a:xfrm>
+          <a:prstGeom prst="rect">
+            <a:avLst/>
+          </a:prstGeom>
+          <a:noFill/>
+        </p:spPr>
+        <p:txBody>
+          <a:bodyPr wrap="square" anchor="ctr" lIns="0" rIns="0" tIns="0" bIns="0">
+            <a:spAutoFit/>
+          </a:bodyPr>
+          <a:lstStyle/>
+          <a:p>
+            <a:pPr algn="ctr">
+              <a:lnSpc>
+                <a:spcPct val="100000"/>
+              </a:lnSpc>
+              <a:spcAft>
+                <a:spcPts val="0"/>
+              </a:spcAft>
+            </a:pPr>
+            <a:r>
+              <a:rPr sz="950" b="0" i="0">
+                <a:solidFill>
+                  <a:srgbClr val="27272A"/>
+                </a:solidFill>
+                <a:latin typeface="Arial"/>
+              </a:rPr>
+              <a:t>сеть по тексту</a:t>
+            </a:r>
+          </a:p>
+          <a:p>
+            <a:pPr algn="ctr">
+              <a:lnSpc>
+                <a:spcPct val="100000"/>
+              </a:lnSpc>
+              <a:spcAft>
+                <a:spcPts val="0"/>
+              </a:spcAft>
+            </a:pPr>
+            <a:r>
+              <a:rPr sz="800" b="0" i="0">
+                <a:solidFill>
+                  <a:srgbClr val="52525B"/>
+                </a:solidFill>
+                <a:latin typeface="Arial"/>
+              </a:rPr>
+              <a:t>готовые веса</a:t>
+            </a:r>
+          </a:p>
+        </p:txBody>
+      </p:sp>
+      <p:cxnSp>
+        <p:nvCxnSpPr>
+          <p:cNvPr id="36" name="Connector 35"/>
+          <p:cNvCxnSpPr/>
+          <p:nvPr/>
+        </p:nvCxnSpPr>
+        <p:spPr>
+          <a:xfrm>
+            <a:off x="1627632" y="3282696"/>
+            <a:ext cx="128016" cy="0"/>
+          </a:xfrm>
+          <a:prstGeom prst="line">
+            <a:avLst/>
+          </a:prstGeom>
+          <a:ln w="19050">
+            <a:solidFill>
+              <a:srgbClr val="71717A"/>
+            </a:solidFill>
+            <a:tailEnd type="triangle" w="med" len="med"/>
+          </a:ln>
+        </p:spPr>
+        <p:style>
+          <a:lnRef idx="2">
+            <a:schemeClr val="accent1"/>
+          </a:lnRef>
+          <a:fillRef idx="0">
+            <a:schemeClr val="accent1"/>
+          </a:fillRef>
+          <a:effectRef idx="1">
+            <a:schemeClr val="accent1"/>
+          </a:effectRef>
+          <a:fontRef idx="minor">
+            <a:schemeClr val="tx1"/>
+          </a:fontRef>
+        </p:style>
+      </p:cxnSp>
+      <p:cxnSp>
+        <p:nvCxnSpPr>
+          <p:cNvPr id="37" name="Connector 36"/>
+          <p:cNvCxnSpPr/>
+          <p:nvPr/>
+        </p:nvCxnSpPr>
+        <p:spPr>
+          <a:xfrm>
+            <a:off x="4050792" y="3282696"/>
+            <a:ext cx="128015" cy="0"/>
+          </a:xfrm>
+          <a:prstGeom prst="line">
+            <a:avLst/>
+          </a:prstGeom>
+          <a:ln w="19050">
+            <a:solidFill>
+              <a:srgbClr val="71717A"/>
+            </a:solidFill>
+            <a:tailEnd type="triangle" w="med" len="med"/>
+          </a:ln>
+        </p:spPr>
+        <p:style>
+          <a:lnRef idx="2">
+            <a:schemeClr val="accent1"/>
+          </a:lnRef>
+          <a:fillRef idx="0">
+            <a:schemeClr val="accent1"/>
+          </a:fillRef>
+          <a:effectRef idx="1">
+            <a:schemeClr val="accent1"/>
+          </a:effectRef>
+          <a:fontRef idx="minor">
+            <a:schemeClr val="tx1"/>
+          </a:fontRef>
+        </p:style>
+      </p:cxnSp>
+      <p:cxnSp>
+        <p:nvCxnSpPr>
+          <p:cNvPr id="38" name="Connector 37"/>
+          <p:cNvCxnSpPr/>
+          <p:nvPr/>
+        </p:nvCxnSpPr>
+        <p:spPr>
+          <a:xfrm>
+            <a:off x="6748272" y="3282696"/>
+            <a:ext cx="128016" cy="0"/>
+          </a:xfrm>
+          <a:prstGeom prst="line">
+            <a:avLst/>
+          </a:prstGeom>
+          <a:ln w="19050">
+            <a:solidFill>
+              <a:srgbClr val="71717A"/>
+            </a:solidFill>
+            <a:tailEnd type="triangle" w="med" len="med"/>
+          </a:ln>
+        </p:spPr>
+        <p:style>
+          <a:lnRef idx="2">
+            <a:schemeClr val="accent1"/>
+          </a:lnRef>
+          <a:fillRef idx="0">
+            <a:schemeClr val="accent1"/>
+          </a:fillRef>
+          <a:effectRef idx="1">
+            <a:schemeClr val="accent1"/>
+          </a:effectRef>
+          <a:fontRef idx="minor">
+            <a:schemeClr val="tx1"/>
+          </a:fontRef>
+        </p:style>
+      </p:cxnSp>
+      <p:cxnSp>
+        <p:nvCxnSpPr>
+          <p:cNvPr id="39" name="Connector 38"/>
+          <p:cNvCxnSpPr/>
+          <p:nvPr/>
+        </p:nvCxnSpPr>
+        <p:spPr>
+          <a:xfrm>
+            <a:off x="8805672" y="3282696"/>
+            <a:ext cx="219456" cy="0"/>
+          </a:xfrm>
+          <a:prstGeom prst="line">
+            <a:avLst/>
+          </a:prstGeom>
+          <a:ln w="19050">
+            <a:solidFill>
+              <a:srgbClr val="71717A"/>
+            </a:solidFill>
+            <a:tailEnd type="triangle" w="med" len="med"/>
+          </a:ln>
+        </p:spPr>
+        <p:style>
+          <a:lnRef idx="2">
+            <a:schemeClr val="accent1"/>
+          </a:lnRef>
+          <a:fillRef idx="0">
+            <a:schemeClr val="accent1"/>
+          </a:fillRef>
+          <a:effectRef idx="1">
+            <a:schemeClr val="accent1"/>
+          </a:effectRef>
+          <a:fontRef idx="minor">
+            <a:schemeClr val="tx1"/>
+          </a:fontRef>
+        </p:style>
+      </p:cxnSp>
+      <p:sp>
+        <p:nvSpPr>
+          <p:cNvPr id="40" name="Rounded Rectangle 39"/>
+          <p:cNvSpPr/>
+          <p:nvPr/>
+        </p:nvSpPr>
+        <p:spPr>
+          <a:xfrm>
+            <a:off x="9052560" y="1481328"/>
+            <a:ext cx="1325880" cy="2103120"/>
+          </a:xfrm>
+          <a:prstGeom prst="roundRect">
+            <a:avLst>
+              <a:gd name="adj" fmla="val 5517"/>
+            </a:avLst>
+          </a:prstGeom>
+          <a:solidFill>
+            <a:srgbClr val="DBEAFE"/>
+          </a:solidFill>
+          <a:ln>
+            <a:noFill/>
+          </a:ln>
+          <a:effectLst/>
+        </p:spPr>
+        <p:style>
+          <a:lnRef idx="1">
+            <a:schemeClr val="accent1"/>
+          </a:lnRef>
+          <a:fillRef idx="3">
+            <a:schemeClr val="accent1"/>
+          </a:fillRef>
+          <a:effectRef idx="2">
+            <a:schemeClr val="accent1"/>
+          </a:effectRef>
+          <a:fontRef idx="minor">
+            <a:schemeClr val="lt1"/>
+          </a:fontRef>
+        </p:style>
+        <p:txBody>
+          <a:bodyPr rtlCol="0" anchor="ctr"/>
+          <a:lstStyle/>
+          <a:p/>
+        </p:txBody>
+      </p:sp>
+      <p:sp>
+        <p:nvSpPr>
+          <p:cNvPr id="41" name="TextBox 40"/>
+          <p:cNvSpPr txBox="1"/>
+          <p:nvPr/>
+        </p:nvSpPr>
+        <p:spPr>
+          <a:xfrm>
+            <a:off x="9125712" y="1481328"/>
+            <a:ext cx="1179576" cy="2103120"/>
+          </a:xfrm>
+          <a:prstGeom prst="rect">
+            <a:avLst/>
+          </a:prstGeom>
+          <a:noFill/>
+        </p:spPr>
+        <p:txBody>
+          <a:bodyPr wrap="square" anchor="ctr" lIns="0" rIns="0" tIns="0" bIns="0">
+            <a:spAutoFit/>
+          </a:bodyPr>
+          <a:lstStyle/>
+          <a:p>
+            <a:pPr algn="ctr">
+              <a:lnSpc>
+                <a:spcPct val="100000"/>
+              </a:lnSpc>
+              <a:spcAft>
+                <a:spcPts val="0"/>
+              </a:spcAft>
+            </a:pPr>
+            <a:r>
+              <a:rPr sz="1100" b="1" i="0">
+                <a:solidFill>
+                  <a:srgbClr val="27272A"/>
+                </a:solidFill>
+                <a:latin typeface="Arial"/>
+              </a:rPr>
+              <a:t>Слияние трёх потоков</a:t>
+            </a:r>
+          </a:p>
+          <a:p>
+            <a:pPr algn="ctr">
+              <a:lnSpc>
+                <a:spcPct val="100000"/>
+              </a:lnSpc>
+              <a:spcAft>
+                <a:spcPts val="0"/>
+              </a:spcAft>
+            </a:pPr>
+            <a:r>
+              <a:rPr sz="850" b="0" i="0">
+                <a:solidFill>
+                  <a:srgbClr val="52525B"/>
+                </a:solidFill>
+                <a:latin typeface="Arial"/>
+              </a:rPr>
+              <a:t>готовые веса</a:t>
+            </a:r>
+          </a:p>
+        </p:txBody>
+      </p:sp>
+      <p:sp>
+        <p:nvSpPr>
+          <p:cNvPr id="42" name="Rounded Rectangle 41"/>
+          <p:cNvSpPr/>
+          <p:nvPr/>
+        </p:nvSpPr>
+        <p:spPr>
+          <a:xfrm>
+            <a:off x="10607040" y="2167128"/>
+            <a:ext cx="1005840" cy="731520"/>
+          </a:xfrm>
+          <a:prstGeom prst="roundRect">
+            <a:avLst>
+              <a:gd name="adj" fmla="val 10000"/>
+            </a:avLst>
+          </a:prstGeom>
+          <a:solidFill>
+            <a:srgbClr val="27272A"/>
+          </a:solidFill>
+          <a:ln>
+            <a:noFill/>
+          </a:ln>
+          <a:effectLst/>
+        </p:spPr>
+        <p:style>
+          <a:lnRef idx="1">
+            <a:schemeClr val="accent1"/>
+          </a:lnRef>
+          <a:fillRef idx="3">
+            <a:schemeClr val="accent1"/>
+          </a:fillRef>
+          <a:effectRef idx="2">
+            <a:schemeClr val="accent1"/>
+          </a:effectRef>
+          <a:fontRef idx="minor">
+            <a:schemeClr val="lt1"/>
+          </a:fontRef>
+        </p:style>
+        <p:txBody>
+          <a:bodyPr rtlCol="0" anchor="ctr"/>
+          <a:lstStyle/>
+          <a:p/>
+        </p:txBody>
+      </p:sp>
+      <p:sp>
+        <p:nvSpPr>
+          <p:cNvPr id="43" name="TextBox 42"/>
+          <p:cNvSpPr txBox="1"/>
+          <p:nvPr/>
+        </p:nvSpPr>
+        <p:spPr>
+          <a:xfrm>
+            <a:off x="10680192" y="2167128"/>
+            <a:ext cx="859536" cy="731520"/>
+          </a:xfrm>
+          <a:prstGeom prst="rect">
+            <a:avLst/>
+          </a:prstGeom>
+          <a:noFill/>
+        </p:spPr>
+        <p:txBody>
+          <a:bodyPr wrap="square" anchor="ctr" lIns="0" rIns="0" tIns="0" bIns="0">
+            <a:spAutoFit/>
+          </a:bodyPr>
+          <a:lstStyle/>
+          <a:p>
+            <a:pPr algn="ctr">
+              <a:lnSpc>
+                <a:spcPct val="100000"/>
+              </a:lnSpc>
+              <a:spcAft>
+                <a:spcPts val="0"/>
+              </a:spcAft>
+            </a:pPr>
+            <a:r>
+              <a:rPr sz="1100" b="1" i="0">
+                <a:solidFill>
+                  <a:srgbClr val="FFFFFF"/>
+                </a:solidFill>
+                <a:latin typeface="Arial"/>
+              </a:rPr>
+              <a:t>Big Five</a:t>
+            </a:r>
+          </a:p>
+          <a:p>
+            <a:pPr algn="ctr">
+              <a:lnSpc>
+                <a:spcPct val="100000"/>
+              </a:lnSpc>
+              <a:spcAft>
+                <a:spcPts val="0"/>
+              </a:spcAft>
+            </a:pPr>
+            <a:r>
+              <a:rPr sz="850" b="0" i="0">
+                <a:solidFill>
+                  <a:srgbClr val="FFFFFF"/>
+                </a:solidFill>
+                <a:latin typeface="Arial"/>
+              </a:rPr>
+              <a:t>5 черт</a:t>
+            </a:r>
+          </a:p>
+        </p:txBody>
+      </p:sp>
+      <p:cxnSp>
+        <p:nvCxnSpPr>
+          <p:cNvPr id="44" name="Connector 43"/>
+          <p:cNvCxnSpPr/>
+          <p:nvPr/>
+        </p:nvCxnSpPr>
+        <p:spPr>
+          <a:xfrm>
+            <a:off x="10405872" y="2532888"/>
+            <a:ext cx="173736" cy="0"/>
+          </a:xfrm>
+          <a:prstGeom prst="line">
+            <a:avLst/>
+          </a:prstGeom>
+          <a:ln w="19050">
+            <a:solidFill>
+              <a:srgbClr val="71717A"/>
+            </a:solidFill>
+            <a:tailEnd type="triangle" w="med" len="med"/>
+          </a:ln>
+        </p:spPr>
+        <p:style>
+          <a:lnRef idx="2">
+            <a:schemeClr val="accent1"/>
+          </a:lnRef>
+          <a:fillRef idx="0">
+            <a:schemeClr val="accent1"/>
+          </a:fillRef>
+          <a:effectRef idx="1">
+            <a:schemeClr val="accent1"/>
+          </a:effectRef>
+          <a:fontRef idx="minor">
+            <a:schemeClr val="tx1"/>
+          </a:fontRef>
+        </p:style>
+      </p:cxnSp>
+      <p:sp>
+        <p:nvSpPr>
+          <p:cNvPr id="45" name="Rounded Rectangle 44"/>
+          <p:cNvSpPr/>
+          <p:nvPr/>
+        </p:nvSpPr>
+        <p:spPr>
+          <a:xfrm>
+            <a:off x="548640" y="3749039"/>
+            <a:ext cx="274320" cy="182880"/>
+          </a:xfrm>
+          <a:prstGeom prst="roundRect">
+            <a:avLst>
+              <a:gd name="adj" fmla="val 40000"/>
+            </a:avLst>
+          </a:prstGeom>
+          <a:solidFill>
+            <a:srgbClr val="DBEAFE"/>
+          </a:solidFill>
+          <a:ln>
+            <a:noFill/>
+          </a:ln>
+          <a:effectLst/>
+        </p:spPr>
+        <p:style>
+          <a:lnRef idx="1">
+            <a:schemeClr val="accent1"/>
+          </a:lnRef>
+          <a:fillRef idx="3">
+            <a:schemeClr val="accent1"/>
+          </a:fillRef>
+          <a:effectRef idx="2">
+            <a:schemeClr val="accent1"/>
+          </a:effectRef>
+          <a:fontRef idx="minor">
+            <a:schemeClr val="lt1"/>
+          </a:fontRef>
+        </p:style>
+        <p:txBody>
+          <a:bodyPr rtlCol="0" anchor="ctr"/>
+          <a:lstStyle/>
+          <a:p/>
+        </p:txBody>
+      </p:sp>
+      <p:sp>
+        <p:nvSpPr>
+          <p:cNvPr id="46" name="TextBox 45"/>
+          <p:cNvSpPr txBox="1"/>
+          <p:nvPr/>
+        </p:nvSpPr>
+        <p:spPr>
+          <a:xfrm>
+            <a:off x="896112" y="3703320"/>
+            <a:ext cx="3840480" cy="274320"/>
+          </a:xfrm>
+          <a:prstGeom prst="rect">
+            <a:avLst/>
+          </a:prstGeom>
+          <a:noFill/>
+        </p:spPr>
+        <p:txBody>
+          <a:bodyPr wrap="square" anchor="t" lIns="0" rIns="0" tIns="0" bIns="0">
+            <a:spAutoFit/>
+          </a:bodyPr>
+          <a:lstStyle/>
+          <a:p>
+            <a:pPr algn="l">
+              <a:lnSpc>
+                <a:spcPct val="110000"/>
+              </a:lnSpc>
+              <a:spcAft>
+                <a:spcPts val="0"/>
+              </a:spcAft>
+            </a:pPr>
+            <a:r>
+              <a:rPr sz="1000" b="0" i="0">
+                <a:solidFill>
+                  <a:srgbClr val="52525B"/>
+                </a:solidFill>
+                <a:latin typeface="Arial"/>
+              </a:rPr>
+              <a:t>голубой — готовые веса авторов, я их не дообучал</a:t>
+            </a:r>
+          </a:p>
+        </p:txBody>
+      </p:sp>
+      <p:sp>
+        <p:nvSpPr>
+          <p:cNvPr id="47" name="Rounded Rectangle 46"/>
+          <p:cNvSpPr/>
+          <p:nvPr/>
+        </p:nvSpPr>
+        <p:spPr>
+          <a:xfrm>
+            <a:off x="4846320" y="3749039"/>
+            <a:ext cx="274320" cy="182880"/>
+          </a:xfrm>
+          <a:prstGeom prst="roundRect">
+            <a:avLst>
+              <a:gd name="adj" fmla="val 40000"/>
+            </a:avLst>
+          </a:prstGeom>
+          <a:solidFill>
+            <a:srgbClr val="F4F4F5"/>
+          </a:solidFill>
+          <a:ln w="12700">
+            <a:solidFill>
+              <a:srgbClr val="D4D4D8"/>
+            </a:solidFill>
+          </a:ln>
+          <a:effectLst/>
+        </p:spPr>
+        <p:style>
+          <a:lnRef idx="1">
+            <a:schemeClr val="accent1"/>
+          </a:lnRef>
+          <a:fillRef idx="3">
+            <a:schemeClr val="accent1"/>
+          </a:fillRef>
+          <a:effectRef idx="2">
+            <a:schemeClr val="accent1"/>
+          </a:effectRef>
+          <a:fontRef idx="minor">
+            <a:schemeClr val="lt1"/>
+          </a:fontRef>
+        </p:style>
+        <p:txBody>
+          <a:bodyPr rtlCol="0" anchor="ctr"/>
+          <a:lstStyle/>
+          <a:p/>
+        </p:txBody>
+      </p:sp>
+      <p:sp>
+        <p:nvSpPr>
+          <p:cNvPr id="48" name="TextBox 47"/>
+          <p:cNvSpPr txBox="1"/>
+          <p:nvPr/>
+        </p:nvSpPr>
+        <p:spPr>
+          <a:xfrm>
+            <a:off x="5193792" y="3703320"/>
+            <a:ext cx="2926080" cy="274320"/>
+          </a:xfrm>
+          <a:prstGeom prst="rect">
+            <a:avLst/>
+          </a:prstGeom>
+          <a:noFill/>
+        </p:spPr>
+        <p:txBody>
+          <a:bodyPr wrap="square" anchor="t" lIns="0" rIns="0" tIns="0" bIns="0">
+            <a:spAutoFit/>
+          </a:bodyPr>
+          <a:lstStyle/>
+          <a:p>
+            <a:pPr algn="l">
+              <a:lnSpc>
+                <a:spcPct val="110000"/>
+              </a:lnSpc>
+              <a:spcAft>
+                <a:spcPts val="0"/>
+              </a:spcAft>
+            </a:pPr>
+            <a:r>
+              <a:rPr sz="1000" b="0" i="0">
+                <a:solidFill>
+                  <a:srgbClr val="52525B"/>
+                </a:solidFill>
+                <a:latin typeface="Arial"/>
+              </a:rPr>
+              <a:t>светло-серый — подготовка данных</a:t>
+            </a:r>
+          </a:p>
+        </p:txBody>
+      </p:sp>
+      <p:sp>
+        <p:nvSpPr>
+          <p:cNvPr id="49" name="TextBox 48"/>
+          <p:cNvSpPr txBox="1"/>
+          <p:nvPr/>
+        </p:nvSpPr>
+        <p:spPr>
+          <a:xfrm>
+            <a:off x="548640" y="3931920"/>
+            <a:ext cx="6766560" cy="274320"/>
+          </a:xfrm>
+          <a:prstGeom prst="rect">
+            <a:avLst/>
+          </a:prstGeom>
+          <a:noFill/>
+        </p:spPr>
+        <p:txBody>
+          <a:bodyPr wrap="square" anchor="t" lIns="0" rIns="0" tIns="0" bIns="0">
+            <a:spAutoFit/>
+          </a:bodyPr>
+          <a:lstStyle/>
+          <a:p>
+            <a:pPr algn="l">
+              <a:lnSpc>
+                <a:spcPct val="110000"/>
+              </a:lnSpc>
+              <a:spcAft>
+                <a:spcPts val="0"/>
+              </a:spcAft>
+            </a:pPr>
+            <a:r>
+              <a:rPr sz="1200" b="1" i="0">
+                <a:solidFill>
+                  <a:srgbClr val="27272A"/>
+                </a:solidFill>
+                <a:latin typeface="Arial"/>
+              </a:rPr>
+              <a:t>Чем она отличается от моей модели</a:t>
+            </a:r>
+          </a:p>
+        </p:txBody>
+      </p:sp>
+      <p:graphicFrame>
+        <p:nvGraphicFramePr>
+          <p:cNvPr id="50" name="Table 49"/>
+          <p:cNvGraphicFramePr>
+            <a:graphicFrameLocks noGrp="1"/>
+          </p:cNvGraphicFramePr>
+          <p:nvPr/>
+        </p:nvGraphicFramePr>
+        <p:xfrm>
+          <a:off x="548640" y="4242816"/>
+          <a:ext cx="6720840" cy="1755648"/>
+        </p:xfrm>
+        <a:graphic>
+          <a:graphicData uri="http://schemas.openxmlformats.org/drawingml/2006/table">
+            <a:tbl>
+              <a:tblPr>
+                <a:tableStyleId>{5C22544A-7EE6-4342-B048-85BDC9FD1C3A}</a:tableStyleId>
+              </a:tblPr>
+              <a:tblGrid>
+                <a:gridCol w="1051560"/>
+                <a:gridCol w="2834640"/>
+                <a:gridCol w="2834640"/>
+              </a:tblGrid>
+              <a:tr h="292608">
+                <a:tc>
+                  <a:txBody>
+                    <a:bodyPr wrap="square"/>
+                    <a:lstStyle/>
+                    <a:p>
+                      <a:r>
+                        <a:rPr sz="950" b="1">
+                          <a:solidFill>
+                            <a:srgbClr val="FFFFFF"/>
+                          </a:solidFill>
+                          <a:latin typeface="Arial"/>
+                        </a:rPr>
+                        <a:t/>
+                      </a:r>
+                    </a:p>
+                  </a:txBody>
+                  <a:tcPr marL="73152" marR="73152" marT="27432" marB="27432" anchor="ctr">
+                    <a:solidFill>
+                      <a:srgbClr val="27272A"/>
+                    </a:solidFill>
+                  </a:tcPr>
+                </a:tc>
+                <a:tc>
+                  <a:txBody>
+                    <a:bodyPr wrap="square"/>
+                    <a:lstStyle/>
+                    <a:p>
+                      <a:r>
+                        <a:rPr sz="950" b="1">
+                          <a:solidFill>
+                            <a:srgbClr val="FFFFFF"/>
+                          </a:solidFill>
+                          <a:latin typeface="Arial"/>
+                        </a:rPr>
+                        <a:t>OCEAN-AI · готовые веса</a:t>
+                      </a:r>
+                    </a:p>
+                  </a:txBody>
+                  <a:tcPr marL="73152" marR="73152" marT="27432" marB="27432" anchor="ctr">
+                    <a:solidFill>
+                      <a:srgbClr val="1D4ED8"/>
+                    </a:solidFill>
+                  </a:tcPr>
+                </a:tc>
+                <a:tc>
+                  <a:txBody>
+                    <a:bodyPr wrap="square"/>
+                    <a:lstStyle/>
+                    <a:p>
+                      <a:r>
+                        <a:rPr sz="950" b="1">
+                          <a:solidFill>
+                            <a:srgbClr val="FFFFFF"/>
+                          </a:solidFill>
+                          <a:latin typeface="Arial"/>
+                        </a:rPr>
+                        <a:t>Моя модель · обучил я</a:t>
+                      </a:r>
+                    </a:p>
+                  </a:txBody>
+                  <a:tcPr marL="73152" marR="73152" marT="27432" marB="27432" anchor="ctr">
+                    <a:solidFill>
+                      <a:srgbClr val="C2410C"/>
+                    </a:solidFill>
+                  </a:tcPr>
+                </a:tc>
+              </a:tr>
+              <a:tr h="292608">
+                <a:tc>
+                  <a:txBody>
+                    <a:bodyPr wrap="square"/>
+                    <a:lstStyle/>
+                    <a:p>
+                      <a:r>
+                        <a:rPr sz="950" b="1">
+                          <a:solidFill>
+                            <a:srgbClr val="27272A"/>
+                          </a:solidFill>
+                          <a:latin typeface="Arial"/>
+                        </a:rPr>
+                        <a:t>Кадры</a:t>
+                      </a:r>
+                    </a:p>
+                  </a:txBody>
+                  <a:tcPr marL="73152" marR="73152" marT="27432" marB="27432" anchor="ctr">
+                    <a:solidFill>
+                      <a:srgbClr val="F4F4F5"/>
+                    </a:solidFill>
+                  </a:tcPr>
+                </a:tc>
+                <a:tc>
+                  <a:txBody>
+                    <a:bodyPr wrap="square"/>
+                    <a:lstStyle/>
+                    <a:p>
+                      <a:r>
+                        <a:rPr sz="950" b="0">
+                          <a:solidFill>
+                            <a:srgbClr val="27272A"/>
+                          </a:solidFill>
+                          <a:latin typeface="Arial"/>
+                        </a:rPr>
+                        <a:t>5 в секунду — 75 на 15-секундный ролик</a:t>
+                      </a:r>
+                    </a:p>
+                  </a:txBody>
+                  <a:tcPr marL="73152" marR="73152" marT="27432" marB="27432" anchor="ctr">
+                    <a:solidFill>
+                      <a:srgbClr val="DBEAFE"/>
+                    </a:solidFill>
+                  </a:tcPr>
+                </a:tc>
+                <a:tc>
+                  <a:txBody>
+                    <a:bodyPr wrap="square"/>
+                    <a:lstStyle/>
+                    <a:p>
+                      <a:r>
+                        <a:rPr sz="950" b="0">
+                          <a:solidFill>
+                            <a:srgbClr val="27272A"/>
+                          </a:solidFill>
+                          <a:latin typeface="Arial"/>
+                        </a:rPr>
+                        <a:t>30 на ролик — 2 в секунду</a:t>
+                      </a:r>
+                    </a:p>
+                  </a:txBody>
+                  <a:tcPr marL="73152" marR="73152" marT="27432" marB="27432" anchor="ctr">
+                    <a:solidFill>
+                      <a:srgbClr val="FFEDD5"/>
+                    </a:solidFill>
+                  </a:tcPr>
+                </a:tc>
+              </a:tr>
+              <a:tr h="292608">
+                <a:tc>
+                  <a:txBody>
+                    <a:bodyPr wrap="square"/>
+                    <a:lstStyle/>
+                    <a:p>
+                      <a:r>
+                        <a:rPr sz="950" b="1">
+                          <a:solidFill>
+                            <a:srgbClr val="27272A"/>
+                          </a:solidFill>
+                          <a:latin typeface="Arial"/>
+                        </a:rPr>
+                        <a:t>Лицо</a:t>
+                      </a:r>
+                    </a:p>
+                  </a:txBody>
+                  <a:tcPr marL="73152" marR="73152" marT="27432" marB="27432" anchor="ctr">
+                    <a:solidFill>
+                      <a:srgbClr val="F4F4F5"/>
+                    </a:solidFill>
+                  </a:tcPr>
+                </a:tc>
+                <a:tc>
+                  <a:txBody>
+                    <a:bodyPr wrap="square"/>
+                    <a:lstStyle/>
+                    <a:p>
+                      <a:r>
+                        <a:rPr sz="950" b="0">
+                          <a:solidFill>
+                            <a:srgbClr val="27272A"/>
+                          </a:solidFill>
+                          <a:latin typeface="Arial"/>
+                        </a:rPr>
+                        <a:t>468 точек лица и картинка лица через ResNet50</a:t>
+                      </a:r>
+                    </a:p>
+                  </a:txBody>
+                  <a:tcPr marL="73152" marR="73152" marT="27432" marB="27432" anchor="ctr">
+                    <a:solidFill>
+                      <a:srgbClr val="DBEAFE"/>
+                    </a:solidFill>
+                  </a:tcPr>
+                </a:tc>
+                <a:tc>
+                  <a:txBody>
+                    <a:bodyPr wrap="square"/>
+                    <a:lstStyle/>
+                    <a:p>
+                      <a:r>
+                        <a:rPr sz="950" b="0">
+                          <a:solidFill>
+                            <a:srgbClr val="27272A"/>
+                          </a:solidFill>
+                          <a:latin typeface="Arial"/>
+                        </a:rPr>
+                        <a:t>вырезанное лицо через CLIP</a:t>
+                      </a:r>
+                    </a:p>
+                  </a:txBody>
+                  <a:tcPr marL="73152" marR="73152" marT="27432" marB="27432" anchor="ctr">
+                    <a:solidFill>
+                      <a:srgbClr val="FFEDD5"/>
+                    </a:solidFill>
+                  </a:tcPr>
+                </a:tc>
+              </a:tr>
+              <a:tr h="292608">
+                <a:tc>
+                  <a:txBody>
+                    <a:bodyPr wrap="square"/>
+                    <a:lstStyle/>
+                    <a:p>
+                      <a:r>
+                        <a:rPr sz="950" b="1">
+                          <a:solidFill>
+                            <a:srgbClr val="27272A"/>
+                          </a:solidFill>
+                          <a:latin typeface="Arial"/>
+                        </a:rPr>
+                        <a:t>Движение</a:t>
+                      </a:r>
+                    </a:p>
+                  </a:txBody>
+                  <a:tcPr marL="73152" marR="73152" marT="27432" marB="27432" anchor="ctr">
+                    <a:solidFill>
+                      <a:srgbClr val="F4F4F5"/>
+                    </a:solidFill>
+                  </a:tcPr>
+                </a:tc>
+                <a:tc>
+                  <a:txBody>
+                    <a:bodyPr wrap="square"/>
+                    <a:lstStyle/>
+                    <a:p>
+                      <a:r>
+                        <a:rPr sz="950" b="0">
+                          <a:solidFill>
+                            <a:srgbClr val="27272A"/>
+                          </a:solidFill>
+                          <a:latin typeface="Arial"/>
+                        </a:rPr>
+                        <a:t>окна по 2 с: сеть видит порядок кадров</a:t>
+                      </a:r>
+                    </a:p>
+                  </a:txBody>
+                  <a:tcPr marL="73152" marR="73152" marT="27432" marB="27432" anchor="ctr">
+                    <a:solidFill>
+                      <a:srgbClr val="DBEAFE"/>
+                    </a:solidFill>
+                  </a:tcPr>
+                </a:tc>
+                <a:tc>
+                  <a:txBody>
+                    <a:bodyPr wrap="square"/>
+                    <a:lstStyle/>
+                    <a:p>
+                      <a:r>
+                        <a:rPr sz="950" b="0">
+                          <a:solidFill>
+                            <a:srgbClr val="27272A"/>
+                          </a:solidFill>
+                          <a:latin typeface="Arial"/>
+                        </a:rPr>
+                        <a:t>среднее и разброс по кадрам, порядок не учитывается</a:t>
+                      </a:r>
+                    </a:p>
+                  </a:txBody>
+                  <a:tcPr marL="73152" marR="73152" marT="27432" marB="27432" anchor="ctr">
+                    <a:solidFill>
+                      <a:srgbClr val="FFEDD5"/>
+                    </a:solidFill>
+                  </a:tcPr>
+                </a:tc>
+              </a:tr>
+              <a:tr h="292608">
+                <a:tc>
+                  <a:txBody>
+                    <a:bodyPr wrap="square"/>
+                    <a:lstStyle/>
+                    <a:p>
+                      <a:r>
+                        <a:rPr sz="950" b="1">
+                          <a:solidFill>
+                            <a:srgbClr val="27272A"/>
+                          </a:solidFill>
+                          <a:latin typeface="Arial"/>
+                        </a:rPr>
+                        <a:t>Голос</a:t>
+                      </a:r>
+                    </a:p>
+                  </a:txBody>
+                  <a:tcPr marL="73152" marR="73152" marT="27432" marB="27432" anchor="ctr">
+                    <a:solidFill>
+                      <a:srgbClr val="F4F4F5"/>
+                    </a:solidFill>
+                  </a:tcPr>
+                </a:tc>
+                <a:tc>
+                  <a:txBody>
+                    <a:bodyPr wrap="square"/>
+                    <a:lstStyle/>
+                    <a:p>
+                      <a:r>
+                        <a:rPr sz="950" b="0">
+                          <a:solidFill>
+                            <a:srgbClr val="27272A"/>
+                          </a:solidFill>
+                          <a:latin typeface="Arial"/>
+                        </a:rPr>
+                        <a:t>openSMILE и спектрограмма</a:t>
+                      </a:r>
+                    </a:p>
+                  </a:txBody>
+                  <a:tcPr marL="73152" marR="73152" marT="27432" marB="27432" anchor="ctr">
+                    <a:solidFill>
+                      <a:srgbClr val="DBEAFE"/>
+                    </a:solidFill>
+                  </a:tcPr>
+                </a:tc>
+                <a:tc>
+                  <a:txBody>
+                    <a:bodyPr wrap="square"/>
+                    <a:lstStyle/>
+                    <a:p>
+                      <a:r>
+                        <a:rPr sz="950" b="0">
+                          <a:solidFill>
+                            <a:srgbClr val="27272A"/>
+                          </a:solidFill>
+                          <a:latin typeface="Arial"/>
+                        </a:rPr>
+                        <a:t>весь звук через CLAP</a:t>
+                      </a:r>
+                    </a:p>
+                  </a:txBody>
+                  <a:tcPr marL="73152" marR="73152" marT="27432" marB="27432" anchor="ctr">
+                    <a:solidFill>
+                      <a:srgbClr val="FFEDD5"/>
+                    </a:solidFill>
+                  </a:tcPr>
+                </a:tc>
+              </a:tr>
+              <a:tr h="292608">
+                <a:tc>
+                  <a:txBody>
+                    <a:bodyPr wrap="square"/>
+                    <a:lstStyle/>
+                    <a:p>
+                      <a:r>
+                        <a:rPr sz="950" b="1">
+                          <a:solidFill>
+                            <a:srgbClr val="27272A"/>
+                          </a:solidFill>
+                          <a:latin typeface="Arial"/>
+                        </a:rPr>
+                        <a:t>Речь</a:t>
+                      </a:r>
+                    </a:p>
+                  </a:txBody>
+                  <a:tcPr marL="73152" marR="73152" marT="27432" marB="27432" anchor="ctr">
+                    <a:solidFill>
+                      <a:srgbClr val="F4F4F5"/>
+                    </a:solidFill>
+                  </a:tcPr>
+                </a:tc>
+                <a:tc>
+                  <a:txBody>
+                    <a:bodyPr wrap="square"/>
+                    <a:lstStyle/>
+                    <a:p>
+                      <a:r>
+                        <a:rPr sz="950" b="0">
+                          <a:solidFill>
+                            <a:srgbClr val="27272A"/>
+                          </a:solidFill>
+                          <a:latin typeface="Arial"/>
+                        </a:rPr>
+                        <a:t>текст через BERT; русский переводится на английский</a:t>
+                      </a:r>
+                    </a:p>
+                  </a:txBody>
+                  <a:tcPr marL="73152" marR="73152" marT="27432" marB="27432" anchor="ctr">
+                    <a:solidFill>
+                      <a:srgbClr val="DBEAFE"/>
+                    </a:solidFill>
+                  </a:tcPr>
+                </a:tc>
+                <a:tc>
+                  <a:txBody>
+                    <a:bodyPr wrap="square"/>
+                    <a:lstStyle/>
+                    <a:p>
+                      <a:r>
+                        <a:rPr sz="950" b="0">
+                          <a:solidFill>
+                            <a:srgbClr val="27272A"/>
+                          </a:solidFill>
+                          <a:latin typeface="Arial"/>
+                        </a:rPr>
+                        <a:t>текст и описание поведения (Qwen-VL) через EmoRoBERTa</a:t>
+                      </a:r>
+                    </a:p>
+                  </a:txBody>
+                  <a:tcPr marL="73152" marR="73152" marT="27432" marB="27432" anchor="ctr">
+                    <a:solidFill>
+                      <a:srgbClr val="FFEDD5"/>
+                    </a:solidFill>
+                  </a:tcPr>
+                </a:tc>
+              </a:tr>
+            </a:tbl>
+          </a:graphicData>
+        </a:graphic>
+      </p:graphicFrame>
+      <p:sp>
+        <p:nvSpPr>
+          <p:cNvPr id="51" name="Rounded Rectangle 50"/>
+          <p:cNvSpPr/>
+          <p:nvPr/>
+        </p:nvSpPr>
+        <p:spPr>
+          <a:xfrm>
+            <a:off x="7543800" y="3959352"/>
+            <a:ext cx="4069080" cy="1051560"/>
+          </a:xfrm>
+          <a:prstGeom prst="roundRect">
+            <a:avLst>
+              <a:gd name="adj" fmla="val 6956"/>
+            </a:avLst>
+          </a:prstGeom>
+          <a:solidFill>
+            <a:srgbClr val="F4F4F5"/>
+          </a:solidFill>
+          <a:ln>
+            <a:noFill/>
+          </a:ln>
+          <a:effectLst/>
+        </p:spPr>
+        <p:style>
+          <a:lnRef idx="1">
+            <a:schemeClr val="accent1"/>
+          </a:lnRef>
+          <a:fillRef idx="3">
+            <a:schemeClr val="accent1"/>
+          </a:fillRef>
+          <a:effectRef idx="2">
+            <a:schemeClr val="accent1"/>
+          </a:effectRef>
+          <a:fontRef idx="minor">
+            <a:schemeClr val="lt1"/>
+          </a:fontRef>
+        </p:style>
+        <p:txBody>
+          <a:bodyPr rtlCol="0" anchor="ctr"/>
+          <a:lstStyle/>
+          <a:p/>
+        </p:txBody>
+      </p:sp>
+      <p:sp>
+        <p:nvSpPr>
+          <p:cNvPr id="52" name="TextBox 51"/>
+          <p:cNvSpPr txBox="1"/>
+          <p:nvPr/>
+        </p:nvSpPr>
+        <p:spPr>
+          <a:xfrm>
+            <a:off x="7708392" y="4005072"/>
+            <a:ext cx="3749039" cy="960120"/>
+          </a:xfrm>
+          <a:prstGeom prst="rect">
+            <a:avLst/>
+          </a:prstGeom>
+          <a:noFill/>
+        </p:spPr>
+        <p:txBody>
+          <a:bodyPr wrap="square" anchor="ctr" lIns="0" rIns="0" tIns="0" bIns="0">
+            <a:spAutoFit/>
+          </a:bodyPr>
+          <a:lstStyle/>
+          <a:p>
+            <a:pPr algn="l">
+              <a:lnSpc>
+                <a:spcPct val="105000"/>
+              </a:lnSpc>
+              <a:spcAft>
+                <a:spcPts val="0"/>
+              </a:spcAft>
+            </a:pPr>
+            <a:r>
+              <a:rPr sz="950" b="1" i="0">
+                <a:solidFill>
+                  <a:srgbClr val="C2410C"/>
+                </a:solidFill>
+                <a:latin typeface="Arial"/>
+              </a:rPr>
+              <a:t>Кто обучал. </a:t>
+            </a:r>
+            <a:r>
+              <a:rPr sz="950" b="0" i="0">
+                <a:solidFill>
+                  <a:srgbClr val="27272A"/>
+                </a:solidFill>
+                <a:latin typeface="Arial"/>
+              </a:rPr>
+              <a:t>Авторы OCEAN-AI из СПб ФИЦ РАН. Веса FIV2 обучены на английских роликах First Impressions V2, веса MuPTA — на русском корпусе MuPTA. Я беру их как есть: английская речь — FIV2, русская — MuPTA.</a:t>
+            </a:r>
+          </a:p>
+        </p:txBody>
+      </p:sp>
+      <p:sp>
+        <p:nvSpPr>
+          <p:cNvPr id="53" name="Rounded Rectangle 52"/>
+          <p:cNvSpPr/>
+          <p:nvPr/>
+        </p:nvSpPr>
+        <p:spPr>
+          <a:xfrm>
+            <a:off x="7543800" y="5120640"/>
+            <a:ext cx="4069080" cy="1051560"/>
+          </a:xfrm>
+          <a:prstGeom prst="roundRect">
+            <a:avLst>
+              <a:gd name="adj" fmla="val 6956"/>
+            </a:avLst>
+          </a:prstGeom>
+          <a:solidFill>
+            <a:srgbClr val="F4F4F5"/>
+          </a:solidFill>
+          <a:ln>
+            <a:noFill/>
+          </a:ln>
+          <a:effectLst/>
+        </p:spPr>
+        <p:style>
+          <a:lnRef idx="1">
+            <a:schemeClr val="accent1"/>
+          </a:lnRef>
+          <a:fillRef idx="3">
+            <a:schemeClr val="accent1"/>
+          </a:fillRef>
+          <a:effectRef idx="2">
+            <a:schemeClr val="accent1"/>
+          </a:effectRef>
+          <a:fontRef idx="minor">
+            <a:schemeClr val="lt1"/>
+          </a:fontRef>
+        </p:style>
+        <p:txBody>
+          <a:bodyPr rtlCol="0" anchor="ctr"/>
+          <a:lstStyle/>
+          <a:p/>
+        </p:txBody>
+      </p:sp>
+      <p:sp>
+        <p:nvSpPr>
+          <p:cNvPr id="54" name="TextBox 53"/>
+          <p:cNvSpPr txBox="1"/>
+          <p:nvPr/>
+        </p:nvSpPr>
+        <p:spPr>
+          <a:xfrm>
+            <a:off x="7708392" y="5166359"/>
+            <a:ext cx="3749039" cy="960120"/>
+          </a:xfrm>
+          <a:prstGeom prst="rect">
+            <a:avLst/>
+          </a:prstGeom>
+          <a:noFill/>
+        </p:spPr>
+        <p:txBody>
+          <a:bodyPr wrap="square" anchor="ctr" lIns="0" rIns="0" tIns="0" bIns="0">
+            <a:spAutoFit/>
+          </a:bodyPr>
+          <a:lstStyle/>
+          <a:p>
+            <a:pPr algn="l">
+              <a:lnSpc>
+                <a:spcPct val="105000"/>
+              </a:lnSpc>
+              <a:spcAft>
+                <a:spcPts val="0"/>
+              </a:spcAft>
+            </a:pPr>
+            <a:r>
+              <a:rPr sz="950" b="1" i="0">
+                <a:solidFill>
+                  <a:srgbClr val="C2410C"/>
+                </a:solidFill>
+                <a:latin typeface="Arial"/>
+              </a:rPr>
+              <a:t>Почему среднее двух систем точнее. </a:t>
+            </a:r>
+            <a:r>
+              <a:rPr sz="950" b="0" i="0">
+                <a:solidFill>
+                  <a:srgbClr val="27272A"/>
+                </a:solidFill>
+                <a:latin typeface="Arial"/>
+              </a:rPr>
+              <a:t>OCEAN-AI видит движение мимики и точную геометрию лица, моя модель — общий облик лица и словесное описание поведения. Ошибки совпадают не полностью (корреляция 0.72–0.84), поэтому в среднем часть из них гасится.</a:t>
+            </a:r>
+          </a:p>
+        </p:txBody>
+      </p:sp>
+      <p:sp>
+        <p:nvSpPr>
+          <p:cNvPr id="55" name="TextBox 54"/>
           <p:cNvSpPr txBox="1"/>
           <p:nvPr/>
         </p:nvSpPr>
